--- a/docs/presentation/DualByte_NovaWorks_AI_PM.pptx
+++ b/docs/presentation/DualByte_NovaWorks_AI_PM.pptx
@@ -17,9 +17,13 @@
     <p:sldId id="265" r:id="rId11"/>
     <p:sldId id="266" r:id="rId12"/>
     <p:sldId id="267" r:id="rId13"/>
+    <p:sldId id="268" r:id="rId14"/>
+    <p:sldId id="269" r:id="rId15"/>
+    <p:sldId id="270" r:id="rId16"/>
+    <p:sldId id="271" r:id="rId17"/>
   </p:sldIdLst>
   <p:notesMasterIdLst>
-    <p:notesMasterId r:id="rId14"/>
+    <p:notesMasterId r:id="rId18"/>
   </p:notesMasterIdLst>
   <p:sldSz cx="12192000" cy="6858000"/>
   <p:notesSz cx="6858000" cy="12192000"/>
@@ -118,18 +122,18 @@
   <p:extLst>
     <p:ext uri="{521415D9-36F7-43E2-AB2F-B90AF26B5E84}">
       <p14:sectionLst xmlns:p14="http://schemas.microsoft.com/office/powerpoint/2010/main">
-        <p14:section name="Introduction" id="{49a71a7a-a05d-0cc7-268f-b1ee73c23c52}">
+        <p14:section name="Introduction" id="{e1af3146-4276-2b9a-cc5c-01e1cd721492}">
           <p14:sldIdLst>
             <p14:sldId id="256"/>
           </p14:sldIdLst>
         </p14:section>
-        <p14:section name="Problem and solution" id="{39dbb471-67dd-834f-e429-aa0234f396c6}">
+        <p14:section name="Problem and solution" id="{9efd965b-27e7-a6e4-e26c-16fd56de259a}">
           <p14:sldIdLst>
             <p14:sldId id="257"/>
             <p14:sldId id="258"/>
           </p14:sldIdLst>
         </p14:section>
-        <p14:section name="Product" id="{78316462-99e5-f4f6-29cd-9dfa1ca45016}">
+        <p14:section name="Product" id="{6a0b7338-52f1-a806-f21b-5769268d9ae9}">
           <p14:sldIdLst>
             <p14:sldId id="259"/>
             <p14:sldId id="260"/>
@@ -139,15 +143,19 @@
             <p14:sldId id="264"/>
           </p14:sldIdLst>
         </p14:section>
-        <p14:section name="Technology" id="{5593b0b4-b0a0-ddf9-801a-48b1b498075f}">
+        <p14:section name="Technology" id="{df35e51b-1c56-4869-55df-aad48e0a7717}">
           <p14:sldIdLst>
             <p14:sldId id="265"/>
+            <p14:sldId id="266"/>
+            <p14:sldId id="267"/>
+            <p14:sldId id="268"/>
+            <p14:sldId id="269"/>
           </p14:sldIdLst>
         </p14:section>
-        <p14:section name="Wrap-up" id="{689987f6-8c7e-6a45-e207-00e6612dc8a2}">
+        <p14:section name="Wrap-up" id="{2c1c5054-3c57-27e4-d99c-204c1ce2dfd7}">
           <p14:sldIdLst>
-            <p14:sldId id="266"/>
-            <p14:sldId id="267"/>
+            <p14:sldId id="270"/>
+            <p14:sldId id="271"/>
           </p14:sldIdLst>
         </p14:section>
       </p14:sectionLst>
@@ -1001,7 +1009,7 @@
           <a:p>
             <a:r>
               <a:rPr lang="en-US" dirty="0"/>
-              <a:t>Why it is useful: the admin saves the time of retyping a meeting, the plan follows the final decisions, invalid AI output is never saved, and everyone gets a focused view. With more time we would add a review step before saving, task status and reminders, audio upload with speech-to-text, and integrations with Slack, Google Meet and Jira.</a:t>
+              <a:t>System architecture. Users use the React UI in the browser. Everything runs in one Next.js app on Vercel: pages, API routes, services with access policies, and Prisma repositories. The app talks to two external services: the Groq AI for transcript extraction, and the Aiven PostgreSQL database. Secrets stay on the server; the browser only holds a signed session cookie.</a:t>
             </a:r>
             <a:endParaRPr lang="en-US" dirty="0"/>
           </a:p>
@@ -1089,6 +1097,358 @@
           <a:p>
             <a:r>
               <a:rPr lang="en-US" dirty="0"/>
+              <a:t>The core flow. The admin submits the transcript. We load the team directory without passwords and send both to Groq, asking for JSON. If the JSON is invalid or Groq is rate-limited, we wait, retry and fall back to the 20B model. Then our business rules run: roles, hours and dates. If anything fails, the admin gets a list of issues and nothing is saved. Otherwise one database transaction saves the clients, projects and tasks, and each role sees its own work.</a:t>
+            </a:r>
+            <a:endParaRPr lang="en-US" dirty="0"/>
+          </a:p>
+        </p:txBody>
+      </p:sp>
+      <p:sp>
+        <p:nvSpPr>
+          <p:cNvPr id="4" name="Slide Number Placeholder 3"/>
+          <p:cNvSpPr>
+            <a:spLocks noGrp="1"/>
+          </p:cNvSpPr>
+          <p:nvPr>
+            <p:ph type="sldNum" sz="quarter" idx="10"/>
+          </p:nvPr>
+        </p:nvSpPr>
+        <p:spPr/>
+        <p:txBody>
+          <a:bodyPr/>
+          <a:lstStyle/>
+          <a:p>
+            <a:fld id="{F7021451-1387-4CA6-816F-3879F97B5CBC}" type="slidenum">
+              <a:rPr lang="en-US"/>
+              <a:t>12</a:t>
+            </a:fld>
+            <a:endParaRPr lang="en-US"/>
+          </a:p>
+        </p:txBody>
+      </p:sp>
+    </p:spTree>
+    <p:extLst>
+      <p:ext uri="{BB962C8B-B14F-4D97-AF65-F5344CB8AC3E}">
+        <p14:creationId xmlns:p14="http://schemas.microsoft.com/office/powerpoint/2010/main" val="1024086991"/>
+      </p:ext>
+    </p:extLst>
+  </p:cSld>
+  <p:clrMapOvr>
+    <a:masterClrMapping/>
+  </p:clrMapOvr>
+</p:notes>
+</file>
+
+<file path=ppt/notesSlides/notesSlide13.xml><?xml version="1.0" encoding="utf-8"?>
+<p:notes xmlns:a="http://schemas.openxmlformats.org/drawingml/2006/main" xmlns:r="http://schemas.openxmlformats.org/officeDocument/2006/relationships" xmlns:p="http://schemas.openxmlformats.org/presentationml/2006/main">
+  <p:cSld>
+    <p:spTree>
+      <p:nvGrpSpPr>
+        <p:cNvPr id="1" name=""/>
+        <p:cNvGrpSpPr/>
+        <p:nvPr/>
+      </p:nvGrpSpPr>
+      <p:grpSpPr>
+        <a:xfrm>
+          <a:off x="0" y="0"/>
+          <a:ext cx="0" cy="0"/>
+          <a:chOff x="0" y="0"/>
+          <a:chExt cx="0" cy="0"/>
+        </a:xfrm>
+      </p:grpSpPr>
+      <p:sp>
+        <p:nvSpPr>
+          <p:cNvPr id="2" name="Slide Image Placeholder 1"/>
+          <p:cNvSpPr>
+            <a:spLocks noGrp="1" noRot="1" noChangeAspect="1"/>
+          </p:cNvSpPr>
+          <p:nvPr>
+            <p:ph type="sldImg"/>
+          </p:nvPr>
+        </p:nvSpPr>
+        <p:spPr/>
+      </p:sp>
+      <p:sp>
+        <p:nvSpPr>
+          <p:cNvPr id="3" name="Notes Placeholder 2"/>
+          <p:cNvSpPr>
+            <a:spLocks noGrp="1"/>
+          </p:cNvSpPr>
+          <p:nvPr>
+            <p:ph type="body" idx="1"/>
+          </p:nvPr>
+        </p:nvSpPr>
+        <p:spPr/>
+        <p:txBody>
+          <a:bodyPr/>
+          <a:lstStyle/>
+          <a:p>
+            <a:r>
+              <a:rPr lang="en-US" dirty="0"/>
+              <a:t>Every API request follows this path. First the signed session cookie is checked; without it you get 401. The user and role come only from that cookie. Then the role filter is applied inside the database query: admin sees everything, a manager only projects they manage, an agent only tasks assigned to them. If the requested project or client is outside that scope, the answer is 403. Otherwise only the allowed data is returned.</a:t>
+            </a:r>
+            <a:endParaRPr lang="en-US" dirty="0"/>
+          </a:p>
+        </p:txBody>
+      </p:sp>
+      <p:sp>
+        <p:nvSpPr>
+          <p:cNvPr id="4" name="Slide Number Placeholder 3"/>
+          <p:cNvSpPr>
+            <a:spLocks noGrp="1"/>
+          </p:cNvSpPr>
+          <p:nvPr>
+            <p:ph type="sldNum" sz="quarter" idx="10"/>
+          </p:nvPr>
+        </p:nvSpPr>
+        <p:spPr/>
+        <p:txBody>
+          <a:bodyPr/>
+          <a:lstStyle/>
+          <a:p>
+            <a:fld id="{F7021451-1387-4CA6-816F-3879F97B5CBC}" type="slidenum">
+              <a:rPr lang="en-US"/>
+              <a:t>13</a:t>
+            </a:fld>
+            <a:endParaRPr lang="en-US"/>
+          </a:p>
+        </p:txBody>
+      </p:sp>
+    </p:spTree>
+    <p:extLst>
+      <p:ext uri="{BB962C8B-B14F-4D97-AF65-F5344CB8AC3E}">
+        <p14:creationId xmlns:p14="http://schemas.microsoft.com/office/powerpoint/2010/main" val="1024086991"/>
+      </p:ext>
+    </p:extLst>
+  </p:cSld>
+  <p:clrMapOvr>
+    <a:masterClrMapping/>
+  </p:clrMapOvr>
+</p:notes>
+</file>
+
+<file path=ppt/notesSlides/notesSlide14.xml><?xml version="1.0" encoding="utf-8"?>
+<p:notes xmlns:a="http://schemas.openxmlformats.org/drawingml/2006/main" xmlns:r="http://schemas.openxmlformats.org/officeDocument/2006/relationships" xmlns:p="http://schemas.openxmlformats.org/presentationml/2006/main">
+  <p:cSld>
+    <p:spTree>
+      <p:nvGrpSpPr>
+        <p:cNvPr id="1" name=""/>
+        <p:cNvGrpSpPr/>
+        <p:nvPr/>
+      </p:nvGrpSpPr>
+      <p:grpSpPr>
+        <a:xfrm>
+          <a:off x="0" y="0"/>
+          <a:ext cx="0" cy="0"/>
+          <a:chOff x="0" y="0"/>
+          <a:chExt cx="0" cy="0"/>
+        </a:xfrm>
+      </p:grpSpPr>
+      <p:sp>
+        <p:nvSpPr>
+          <p:cNvPr id="2" name="Slide Image Placeholder 1"/>
+          <p:cNvSpPr>
+            <a:spLocks noGrp="1" noRot="1" noChangeAspect="1"/>
+          </p:cNvSpPr>
+          <p:nvPr>
+            <p:ph type="sldImg"/>
+          </p:nvPr>
+        </p:nvSpPr>
+        <p:spPr/>
+      </p:sp>
+      <p:sp>
+        <p:nvSpPr>
+          <p:cNvPr id="3" name="Notes Placeholder 2"/>
+          <p:cNvSpPr>
+            <a:spLocks noGrp="1"/>
+          </p:cNvSpPr>
+          <p:nvPr>
+            <p:ph type="body" idx="1"/>
+          </p:nvPr>
+        </p:nvSpPr>
+        <p:spPr/>
+        <p:txBody>
+          <a:bodyPr/>
+          <a:lstStyle/>
+          <a:p>
+            <a:r>
+              <a:rPr lang="en-US" dirty="0"/>
+              <a:t>The data model has five tables. A user manages projects and is assigned tasks. Each project belongs to a client and contains tasks. Every transcript conversion is stored as a TranscriptRun, which links to the projects it created, so we have an audit log of what the AI produced.</a:t>
+            </a:r>
+            <a:endParaRPr lang="en-US" dirty="0"/>
+          </a:p>
+        </p:txBody>
+      </p:sp>
+      <p:sp>
+        <p:nvSpPr>
+          <p:cNvPr id="4" name="Slide Number Placeholder 3"/>
+          <p:cNvSpPr>
+            <a:spLocks noGrp="1"/>
+          </p:cNvSpPr>
+          <p:nvPr>
+            <p:ph type="sldNum" sz="quarter" idx="10"/>
+          </p:nvPr>
+        </p:nvSpPr>
+        <p:spPr/>
+        <p:txBody>
+          <a:bodyPr/>
+          <a:lstStyle/>
+          <a:p>
+            <a:fld id="{F7021451-1387-4CA6-816F-3879F97B5CBC}" type="slidenum">
+              <a:rPr lang="en-US"/>
+              <a:t>14</a:t>
+            </a:fld>
+            <a:endParaRPr lang="en-US"/>
+          </a:p>
+        </p:txBody>
+      </p:sp>
+    </p:spTree>
+    <p:extLst>
+      <p:ext uri="{BB962C8B-B14F-4D97-AF65-F5344CB8AC3E}">
+        <p14:creationId xmlns:p14="http://schemas.microsoft.com/office/powerpoint/2010/main" val="1024086991"/>
+      </p:ext>
+    </p:extLst>
+  </p:cSld>
+  <p:clrMapOvr>
+    <a:masterClrMapping/>
+  </p:clrMapOvr>
+</p:notes>
+</file>
+
+<file path=ppt/notesSlides/notesSlide15.xml><?xml version="1.0" encoding="utf-8"?>
+<p:notes xmlns:a="http://schemas.openxmlformats.org/drawingml/2006/main" xmlns:r="http://schemas.openxmlformats.org/officeDocument/2006/relationships" xmlns:p="http://schemas.openxmlformats.org/presentationml/2006/main">
+  <p:cSld>
+    <p:spTree>
+      <p:nvGrpSpPr>
+        <p:cNvPr id="1" name=""/>
+        <p:cNvGrpSpPr/>
+        <p:nvPr/>
+      </p:nvGrpSpPr>
+      <p:grpSpPr>
+        <a:xfrm>
+          <a:off x="0" y="0"/>
+          <a:ext cx="0" cy="0"/>
+          <a:chOff x="0" y="0"/>
+          <a:chExt cx="0" cy="0"/>
+        </a:xfrm>
+      </p:grpSpPr>
+      <p:sp>
+        <p:nvSpPr>
+          <p:cNvPr id="2" name="Slide Image Placeholder 1"/>
+          <p:cNvSpPr>
+            <a:spLocks noGrp="1" noRot="1" noChangeAspect="1"/>
+          </p:cNvSpPr>
+          <p:nvPr>
+            <p:ph type="sldImg"/>
+          </p:nvPr>
+        </p:nvSpPr>
+        <p:spPr/>
+      </p:sp>
+      <p:sp>
+        <p:nvSpPr>
+          <p:cNvPr id="3" name="Notes Placeholder 2"/>
+          <p:cNvSpPr>
+            <a:spLocks noGrp="1"/>
+          </p:cNvSpPr>
+          <p:nvPr>
+            <p:ph type="body" idx="1"/>
+          </p:nvPr>
+        </p:nvSpPr>
+        <p:spPr/>
+        <p:txBody>
+          <a:bodyPr/>
+          <a:lstStyle/>
+          <a:p>
+            <a:r>
+              <a:rPr lang="en-US" dirty="0"/>
+              <a:t>Why it is useful: the admin saves the time of retyping a meeting, the plan follows the final decisions, invalid AI output is never saved, and everyone gets a focused view. With more time we would add a review step before saving, task status and reminders, audio upload with speech-to-text, and integrations with Slack, Google Meet and Jira.</a:t>
+            </a:r>
+            <a:endParaRPr lang="en-US" dirty="0"/>
+          </a:p>
+        </p:txBody>
+      </p:sp>
+      <p:sp>
+        <p:nvSpPr>
+          <p:cNvPr id="4" name="Slide Number Placeholder 3"/>
+          <p:cNvSpPr>
+            <a:spLocks noGrp="1"/>
+          </p:cNvSpPr>
+          <p:nvPr>
+            <p:ph type="sldNum" sz="quarter" idx="10"/>
+          </p:nvPr>
+        </p:nvSpPr>
+        <p:spPr/>
+        <p:txBody>
+          <a:bodyPr/>
+          <a:lstStyle/>
+          <a:p>
+            <a:fld id="{F7021451-1387-4CA6-816F-3879F97B5CBC}" type="slidenum">
+              <a:rPr lang="en-US"/>
+              <a:t>15</a:t>
+            </a:fld>
+            <a:endParaRPr lang="en-US"/>
+          </a:p>
+        </p:txBody>
+      </p:sp>
+    </p:spTree>
+    <p:extLst>
+      <p:ext uri="{BB962C8B-B14F-4D97-AF65-F5344CB8AC3E}">
+        <p14:creationId xmlns:p14="http://schemas.microsoft.com/office/powerpoint/2010/main" val="1024086991"/>
+      </p:ext>
+    </p:extLst>
+  </p:cSld>
+  <p:clrMapOvr>
+    <a:masterClrMapping/>
+  </p:clrMapOvr>
+</p:notes>
+</file>
+
+<file path=ppt/notesSlides/notesSlide16.xml><?xml version="1.0" encoding="utf-8"?>
+<p:notes xmlns:a="http://schemas.openxmlformats.org/drawingml/2006/main" xmlns:r="http://schemas.openxmlformats.org/officeDocument/2006/relationships" xmlns:p="http://schemas.openxmlformats.org/presentationml/2006/main">
+  <p:cSld>
+    <p:spTree>
+      <p:nvGrpSpPr>
+        <p:cNvPr id="1" name=""/>
+        <p:cNvGrpSpPr/>
+        <p:nvPr/>
+      </p:nvGrpSpPr>
+      <p:grpSpPr>
+        <a:xfrm>
+          <a:off x="0" y="0"/>
+          <a:ext cx="0" cy="0"/>
+          <a:chOff x="0" y="0"/>
+          <a:chExt cx="0" cy="0"/>
+        </a:xfrm>
+      </p:grpSpPr>
+      <p:sp>
+        <p:nvSpPr>
+          <p:cNvPr id="2" name="Slide Image Placeholder 1"/>
+          <p:cNvSpPr>
+            <a:spLocks noGrp="1" noRot="1" noChangeAspect="1"/>
+          </p:cNvSpPr>
+          <p:nvPr>
+            <p:ph type="sldImg"/>
+          </p:nvPr>
+        </p:nvSpPr>
+        <p:spPr/>
+      </p:sp>
+      <p:sp>
+        <p:nvSpPr>
+          <p:cNvPr id="3" name="Notes Placeholder 2"/>
+          <p:cNvSpPr>
+            <a:spLocks noGrp="1"/>
+          </p:cNvSpPr>
+          <p:nvPr>
+            <p:ph type="body" idx="1"/>
+          </p:nvPr>
+        </p:nvSpPr>
+        <p:spPr/>
+        <p:txBody>
+          <a:bodyPr/>
+          <a:lstStyle/>
+          <a:p>
+            <a:r>
+              <a:rPr lang="en-US" dirty="0"/>
               <a:t>LIVE DEMO SCRIPT (about 4 minutes). Before judging: run npm run db:reset so the dashboard starts empty.
 1. Log in as admin@novaworks.example / Demo123!. Show the empty dashboard: no signup needed, accounts are seeded.
 2. Create from Transcript → Load supplied meeting transcript → Create. Point out the locked button and the team directory panel.
@@ -1120,7 +1480,7 @@
           <a:p>
             <a:fld id="{F7021451-1387-4CA6-816F-3879F97B5CBC}" type="slidenum">
               <a:rPr lang="en-US"/>
-              <a:t>12</a:t>
+              <a:t>16</a:t>
             </a:fld>
             <a:endParaRPr lang="en-US"/>
           </a:p>
@@ -3746,6 +4106,4975 @@
                   <a:schemeClr val="tx1"/>
                 </a:solidFill>
               </a:rPr>
+              <a:t>System architecture</a:t>
+            </a:r>
+            <a:endParaRPr lang="en-US" sz="3400" dirty="0"/>
+          </a:p>
+        </p:txBody>
+      </p:sp>
+      <p:sp>
+        <p:nvSpPr>
+          <p:cNvPr id="3" name="role pill Admin"/>
+          <p:cNvSpPr/>
+          <p:nvPr/>
+        </p:nvSpPr>
+        <p:spPr>
+          <a:xfrm>
+            <a:off x="640080" y="1600200"/>
+            <a:ext cx="1828800" cy="384048"/>
+          </a:xfrm>
+          <a:prstGeom prst="roundRect">
+            <a:avLst>
+              <a:gd name="adj" fmla="val 50000"/>
+            </a:avLst>
+          </a:prstGeom>
+          <a:solidFill>
+            <a:srgbClr val="4F46E5"/>
+          </a:solidFill>
+          <a:ln w="12700">
+            <a:solidFill>
+              <a:srgbClr val="4F46E5"/>
+            </a:solidFill>
+            <a:prstDash val="solid"/>
+          </a:ln>
+        </p:spPr>
+      </p:sp>
+      <p:sp>
+        <p:nvSpPr>
+          <p:cNvPr id="4" name="role pill Admin text"/>
+          <p:cNvSpPr txBox="1"/>
+          <p:nvPr/>
+        </p:nvSpPr>
+        <p:spPr>
+          <a:xfrm>
+            <a:off x="640080" y="1600200"/>
+            <a:ext cx="1828800" cy="384048"/>
+          </a:xfrm>
+          <a:prstGeom prst="rect">
+            <a:avLst/>
+          </a:prstGeom>
+          <a:noFill/>
+          <a:ln/>
+        </p:spPr>
+        <p:txBody>
+          <a:bodyPr wrap="square" lIns="0" tIns="0" rIns="0" bIns="0" rtlCol="0" anchor="ctr"/>
+          <a:lstStyle/>
+          <a:p>
+            <a:pPr algn="ctr" indent="0" marL="0">
+              <a:buNone/>
+            </a:pPr>
+            <a:r>
+              <a:rPr lang="en-US" sz="1400" b="1" dirty="0">
+                <a:solidFill>
+                  <a:srgbClr val="FFFFFF"/>
+                </a:solidFill>
+              </a:rPr>
+              <a:t>Admin</a:t>
+            </a:r>
+            <a:endParaRPr lang="en-US" sz="1400" dirty="0"/>
+          </a:p>
+        </p:txBody>
+      </p:sp>
+      <p:sp>
+        <p:nvSpPr>
+          <p:cNvPr id="5" name="role pill Manager"/>
+          <p:cNvSpPr/>
+          <p:nvPr/>
+        </p:nvSpPr>
+        <p:spPr>
+          <a:xfrm>
+            <a:off x="640080" y="2103120"/>
+            <a:ext cx="1828800" cy="384048"/>
+          </a:xfrm>
+          <a:prstGeom prst="roundRect">
+            <a:avLst>
+              <a:gd name="adj" fmla="val 50000"/>
+            </a:avLst>
+          </a:prstGeom>
+          <a:solidFill>
+            <a:srgbClr val="0D9488"/>
+          </a:solidFill>
+          <a:ln w="12700">
+            <a:solidFill>
+              <a:srgbClr val="0D9488"/>
+            </a:solidFill>
+            <a:prstDash val="solid"/>
+          </a:ln>
+        </p:spPr>
+      </p:sp>
+      <p:sp>
+        <p:nvSpPr>
+          <p:cNvPr id="6" name="role pill Manager text"/>
+          <p:cNvSpPr txBox="1"/>
+          <p:nvPr/>
+        </p:nvSpPr>
+        <p:spPr>
+          <a:xfrm>
+            <a:off x="640080" y="2103120"/>
+            <a:ext cx="1828800" cy="384048"/>
+          </a:xfrm>
+          <a:prstGeom prst="rect">
+            <a:avLst/>
+          </a:prstGeom>
+          <a:noFill/>
+          <a:ln/>
+        </p:spPr>
+        <p:txBody>
+          <a:bodyPr wrap="square" lIns="0" tIns="0" rIns="0" bIns="0" rtlCol="0" anchor="ctr"/>
+          <a:lstStyle/>
+          <a:p>
+            <a:pPr algn="ctr" indent="0" marL="0">
+              <a:buNone/>
+            </a:pPr>
+            <a:r>
+              <a:rPr lang="en-US" sz="1400" b="1" dirty="0">
+                <a:solidFill>
+                  <a:srgbClr val="FFFFFF"/>
+                </a:solidFill>
+              </a:rPr>
+              <a:t>Manager</a:t>
+            </a:r>
+            <a:endParaRPr lang="en-US" sz="1400" dirty="0"/>
+          </a:p>
+        </p:txBody>
+      </p:sp>
+      <p:sp>
+        <p:nvSpPr>
+          <p:cNvPr id="7" name="role pill Agent"/>
+          <p:cNvSpPr/>
+          <p:nvPr/>
+        </p:nvSpPr>
+        <p:spPr>
+          <a:xfrm>
+            <a:off x="640080" y="2606040"/>
+            <a:ext cx="1828800" cy="384048"/>
+          </a:xfrm>
+          <a:prstGeom prst="roundRect">
+            <a:avLst>
+              <a:gd name="adj" fmla="val 50000"/>
+            </a:avLst>
+          </a:prstGeom>
+          <a:solidFill>
+            <a:srgbClr val="D97706"/>
+          </a:solidFill>
+          <a:ln w="12700">
+            <a:solidFill>
+              <a:srgbClr val="D97706"/>
+            </a:solidFill>
+            <a:prstDash val="solid"/>
+          </a:ln>
+        </p:spPr>
+      </p:sp>
+      <p:sp>
+        <p:nvSpPr>
+          <p:cNvPr id="8" name="role pill Agent text"/>
+          <p:cNvSpPr txBox="1"/>
+          <p:nvPr/>
+        </p:nvSpPr>
+        <p:spPr>
+          <a:xfrm>
+            <a:off x="640080" y="2606040"/>
+            <a:ext cx="1828800" cy="384048"/>
+          </a:xfrm>
+          <a:prstGeom prst="rect">
+            <a:avLst/>
+          </a:prstGeom>
+          <a:noFill/>
+          <a:ln/>
+        </p:spPr>
+        <p:txBody>
+          <a:bodyPr wrap="square" lIns="0" tIns="0" rIns="0" bIns="0" rtlCol="0" anchor="ctr"/>
+          <a:lstStyle/>
+          <a:p>
+            <a:pPr algn="ctr" indent="0" marL="0">
+              <a:buNone/>
+            </a:pPr>
+            <a:r>
+              <a:rPr lang="en-US" sz="1400" b="1" dirty="0">
+                <a:solidFill>
+                  <a:srgbClr val="FFFFFF"/>
+                </a:solidFill>
+              </a:rPr>
+              <a:t>Agent</a:t>
+            </a:r>
+            <a:endParaRPr lang="en-US" sz="1400" dirty="0"/>
+          </a:p>
+        </p:txBody>
+      </p:sp>
+      <p:sp>
+        <p:nvSpPr>
+          <p:cNvPr id="9" name="diagram shape 1"/>
+          <p:cNvSpPr/>
+          <p:nvPr/>
+        </p:nvSpPr>
+        <p:spPr>
+          <a:xfrm>
+            <a:off x="548640" y="3291840"/>
+            <a:ext cx="2011680" cy="1188720"/>
+          </a:xfrm>
+          <a:prstGeom prst="roundRect">
+            <a:avLst>
+              <a:gd name="adj" fmla="val 7692"/>
+            </a:avLst>
+          </a:prstGeom>
+          <a:solidFill>
+            <a:srgbClr val="FFFFFF"/>
+          </a:solidFill>
+          <a:ln w="19050">
+            <a:solidFill>
+              <a:srgbClr val="CBD5E1"/>
+            </a:solidFill>
+            <a:prstDash val="solid"/>
+          </a:ln>
+        </p:spPr>
+      </p:sp>
+      <p:sp>
+        <p:nvSpPr>
+          <p:cNvPr id="10" name="diagram label 1"/>
+          <p:cNvSpPr txBox="1"/>
+          <p:nvPr/>
+        </p:nvSpPr>
+        <p:spPr>
+          <a:xfrm>
+            <a:off x="640080" y="3291840"/>
+            <a:ext cx="1828800" cy="1188720"/>
+          </a:xfrm>
+          <a:prstGeom prst="rect">
+            <a:avLst/>
+          </a:prstGeom>
+          <a:noFill/>
+          <a:ln/>
+        </p:spPr>
+        <p:txBody>
+          <a:bodyPr wrap="square" lIns="0" tIns="0" rIns="0" bIns="0" rtlCol="0" anchor="ctr"/>
+          <a:lstStyle/>
+          <a:p>
+            <a:pPr algn="ctr" indent="0" marL="0">
+              <a:buNone/>
+            </a:pPr>
+            <a:r>
+              <a:rPr lang="en-US" sz="1400" b="1" dirty="0">
+                <a:solidFill>
+                  <a:srgbClr val="0F172A"/>
+                </a:solidFill>
+              </a:rPr>
+              <a:t>Browser</a:t>
+            </a:r>
+            <a:endParaRPr lang="en-US" sz="1400" dirty="0"/>
+          </a:p>
+          <a:p>
+            <a:pPr algn="ctr" indent="0" marL="0">
+              <a:buNone/>
+            </a:pPr>
+            <a:r>
+              <a:rPr lang="en-US" sz="1400" b="1" dirty="0">
+                <a:solidFill>
+                  <a:srgbClr val="0F172A"/>
+                </a:solidFill>
+              </a:rPr>
+              <a:t>React UI</a:t>
+            </a:r>
+            <a:endParaRPr lang="en-US" sz="1400" dirty="0"/>
+          </a:p>
+        </p:txBody>
+      </p:sp>
+      <p:sp>
+        <p:nvSpPr>
+          <p:cNvPr id="11" name="diagram arrow 2"/>
+          <p:cNvSpPr/>
+          <p:nvPr/>
+        </p:nvSpPr>
+        <p:spPr>
+          <a:xfrm>
+            <a:off x="1554480" y="3090672"/>
+            <a:ext cx="914" cy="201168"/>
+          </a:xfrm>
+          <a:prstGeom prst="line">
+            <a:avLst/>
+          </a:prstGeom>
+          <a:noFill/>
+          <a:ln w="22225">
+            <a:solidFill>
+              <a:srgbClr val="64748B"/>
+            </a:solidFill>
+            <a:prstDash val="solid"/>
+            <a:tailEnd type="triangle"/>
+          </a:ln>
+        </p:spPr>
+      </p:sp>
+      <p:sp>
+        <p:nvSpPr>
+          <p:cNvPr id="12" name="vercel container"/>
+          <p:cNvSpPr/>
+          <p:nvPr/>
+        </p:nvSpPr>
+        <p:spPr>
+          <a:xfrm>
+            <a:off x="3246120" y="1417320"/>
+            <a:ext cx="4846320" cy="4572000"/>
+          </a:xfrm>
+          <a:prstGeom prst="roundRect">
+            <a:avLst>
+              <a:gd name="adj" fmla="val 2400"/>
+            </a:avLst>
+          </a:prstGeom>
+          <a:solidFill>
+            <a:srgbClr val="F8FAFC"/>
+          </a:solidFill>
+          <a:ln w="15875">
+            <a:solidFill>
+              <a:srgbClr val="94A3B8"/>
+            </a:solidFill>
+            <a:prstDash val="dash"/>
+          </a:ln>
+        </p:spPr>
+      </p:sp>
+      <p:sp>
+        <p:nvSpPr>
+          <p:cNvPr id="13" name="diagram note 3"/>
+          <p:cNvSpPr txBox="1"/>
+          <p:nvPr/>
+        </p:nvSpPr>
+        <p:spPr>
+          <a:xfrm>
+            <a:off x="3429000" y="1527048"/>
+            <a:ext cx="4480560" cy="292608"/>
+          </a:xfrm>
+          <a:prstGeom prst="rect">
+            <a:avLst/>
+          </a:prstGeom>
+          <a:noFill/>
+          <a:ln/>
+        </p:spPr>
+        <p:txBody>
+          <a:bodyPr wrap="square" lIns="0" tIns="0" rIns="0" bIns="0" rtlCol="0" anchor="ctr"/>
+          <a:lstStyle/>
+          <a:p>
+            <a:pPr algn="ctr" indent="0" marL="0">
+              <a:buNone/>
+            </a:pPr>
+            <a:r>
+              <a:rPr lang="en-US" sz="1400" b="1" dirty="0">
+                <a:solidFill>
+                  <a:srgbClr val="334155"/>
+                </a:solidFill>
+              </a:rPr>
+              <a:t>Vercel · one Next.js 16 app</a:t>
+            </a:r>
+            <a:endParaRPr lang="en-US" sz="1400" dirty="0"/>
+          </a:p>
+        </p:txBody>
+      </p:sp>
+      <p:sp>
+        <p:nvSpPr>
+          <p:cNvPr id="14" name="diagram shape 4"/>
+          <p:cNvSpPr/>
+          <p:nvPr/>
+        </p:nvSpPr>
+        <p:spPr>
+          <a:xfrm>
+            <a:off x="3611880" y="1965960"/>
+            <a:ext cx="4114800" cy="713232"/>
+          </a:xfrm>
+          <a:prstGeom prst="roundRect">
+            <a:avLst>
+              <a:gd name="adj" fmla="val 12821"/>
+            </a:avLst>
+          </a:prstGeom>
+          <a:solidFill>
+            <a:srgbClr val="FFFFFF"/>
+          </a:solidFill>
+          <a:ln w="19050">
+            <a:solidFill>
+              <a:srgbClr val="CBD5E1"/>
+            </a:solidFill>
+            <a:prstDash val="solid"/>
+          </a:ln>
+        </p:spPr>
+      </p:sp>
+      <p:sp>
+        <p:nvSpPr>
+          <p:cNvPr id="15" name="diagram label 4"/>
+          <p:cNvSpPr txBox="1"/>
+          <p:nvPr/>
+        </p:nvSpPr>
+        <p:spPr>
+          <a:xfrm>
+            <a:off x="3703320" y="1965960"/>
+            <a:ext cx="3931920" cy="713232"/>
+          </a:xfrm>
+          <a:prstGeom prst="rect">
+            <a:avLst/>
+          </a:prstGeom>
+          <a:noFill/>
+          <a:ln/>
+        </p:spPr>
+        <p:txBody>
+          <a:bodyPr wrap="square" lIns="0" tIns="0" rIns="0" bIns="0" rtlCol="0" anchor="ctr"/>
+          <a:lstStyle/>
+          <a:p>
+            <a:pPr algn="ctr" indent="0" marL="0">
+              <a:buNone/>
+            </a:pPr>
+            <a:r>
+              <a:rPr lang="en-US" sz="1400" b="1" dirty="0">
+                <a:solidFill>
+                  <a:srgbClr val="0F172A"/>
+                </a:solidFill>
+              </a:rPr>
+              <a:t>Pages (server-checked session)</a:t>
+            </a:r>
+            <a:endParaRPr lang="en-US" sz="1400" dirty="0"/>
+          </a:p>
+        </p:txBody>
+      </p:sp>
+      <p:sp>
+        <p:nvSpPr>
+          <p:cNvPr id="16" name="diagram arrow 5"/>
+          <p:cNvSpPr/>
+          <p:nvPr/>
+        </p:nvSpPr>
+        <p:spPr>
+          <a:xfrm>
+            <a:off x="5669280" y="2679192"/>
+            <a:ext cx="914" cy="274320"/>
+          </a:xfrm>
+          <a:prstGeom prst="line">
+            <a:avLst/>
+          </a:prstGeom>
+          <a:noFill/>
+          <a:ln w="22225">
+            <a:solidFill>
+              <a:srgbClr val="64748B"/>
+            </a:solidFill>
+            <a:prstDash val="solid"/>
+            <a:tailEnd type="triangle"/>
+          </a:ln>
+        </p:spPr>
+      </p:sp>
+      <p:sp>
+        <p:nvSpPr>
+          <p:cNvPr id="17" name="diagram shape 6"/>
+          <p:cNvSpPr/>
+          <p:nvPr/>
+        </p:nvSpPr>
+        <p:spPr>
+          <a:xfrm>
+            <a:off x="3611880" y="2953512"/>
+            <a:ext cx="4114800" cy="713232"/>
+          </a:xfrm>
+          <a:prstGeom prst="roundRect">
+            <a:avLst>
+              <a:gd name="adj" fmla="val 12821"/>
+            </a:avLst>
+          </a:prstGeom>
+          <a:solidFill>
+            <a:srgbClr val="FFFFFF"/>
+          </a:solidFill>
+          <a:ln w="19050">
+            <a:solidFill>
+              <a:srgbClr val="CBD5E1"/>
+            </a:solidFill>
+            <a:prstDash val="solid"/>
+          </a:ln>
+        </p:spPr>
+      </p:sp>
+      <p:sp>
+        <p:nvSpPr>
+          <p:cNvPr id="18" name="diagram label 6"/>
+          <p:cNvSpPr txBox="1"/>
+          <p:nvPr/>
+        </p:nvSpPr>
+        <p:spPr>
+          <a:xfrm>
+            <a:off x="3703320" y="2953512"/>
+            <a:ext cx="3931920" cy="713232"/>
+          </a:xfrm>
+          <a:prstGeom prst="rect">
+            <a:avLst/>
+          </a:prstGeom>
+          <a:noFill/>
+          <a:ln/>
+        </p:spPr>
+        <p:txBody>
+          <a:bodyPr wrap="square" lIns="0" tIns="0" rIns="0" bIns="0" rtlCol="0" anchor="ctr"/>
+          <a:lstStyle/>
+          <a:p>
+            <a:pPr algn="ctr" indent="0" marL="0">
+              <a:buNone/>
+            </a:pPr>
+            <a:r>
+              <a:rPr lang="en-US" sz="1400" b="1" dirty="0">
+                <a:solidFill>
+                  <a:srgbClr val="0F172A"/>
+                </a:solidFill>
+              </a:rPr>
+              <a:t>API routes · withHandler()</a:t>
+            </a:r>
+            <a:endParaRPr lang="en-US" sz="1400" dirty="0"/>
+          </a:p>
+        </p:txBody>
+      </p:sp>
+      <p:sp>
+        <p:nvSpPr>
+          <p:cNvPr id="19" name="diagram arrow 7"/>
+          <p:cNvSpPr/>
+          <p:nvPr/>
+        </p:nvSpPr>
+        <p:spPr>
+          <a:xfrm>
+            <a:off x="5669280" y="3666744"/>
+            <a:ext cx="914" cy="274320"/>
+          </a:xfrm>
+          <a:prstGeom prst="line">
+            <a:avLst/>
+          </a:prstGeom>
+          <a:noFill/>
+          <a:ln w="22225">
+            <a:solidFill>
+              <a:srgbClr val="64748B"/>
+            </a:solidFill>
+            <a:prstDash val="solid"/>
+            <a:tailEnd type="triangle"/>
+          </a:ln>
+        </p:spPr>
+      </p:sp>
+      <p:sp>
+        <p:nvSpPr>
+          <p:cNvPr id="20" name="diagram shape 8"/>
+          <p:cNvSpPr/>
+          <p:nvPr/>
+        </p:nvSpPr>
+        <p:spPr>
+          <a:xfrm>
+            <a:off x="3611880" y="3941064"/>
+            <a:ext cx="4114800" cy="713232"/>
+          </a:xfrm>
+          <a:prstGeom prst="roundRect">
+            <a:avLst>
+              <a:gd name="adj" fmla="val 12821"/>
+            </a:avLst>
+          </a:prstGeom>
+          <a:solidFill>
+            <a:srgbClr val="EEF2FF"/>
+          </a:solidFill>
+          <a:ln w="19050">
+            <a:solidFill>
+              <a:srgbClr val="4F46E5"/>
+            </a:solidFill>
+            <a:prstDash val="solid"/>
+          </a:ln>
+        </p:spPr>
+      </p:sp>
+      <p:sp>
+        <p:nvSpPr>
+          <p:cNvPr id="21" name="diagram label 8"/>
+          <p:cNvSpPr txBox="1"/>
+          <p:nvPr/>
+        </p:nvSpPr>
+        <p:spPr>
+          <a:xfrm>
+            <a:off x="3703320" y="3941064"/>
+            <a:ext cx="3931920" cy="713232"/>
+          </a:xfrm>
+          <a:prstGeom prst="rect">
+            <a:avLst/>
+          </a:prstGeom>
+          <a:noFill/>
+          <a:ln/>
+        </p:spPr>
+        <p:txBody>
+          <a:bodyPr wrap="square" lIns="0" tIns="0" rIns="0" bIns="0" rtlCol="0" anchor="ctr"/>
+          <a:lstStyle/>
+          <a:p>
+            <a:pPr algn="ctr" indent="0" marL="0">
+              <a:buNone/>
+            </a:pPr>
+            <a:r>
+              <a:rPr lang="en-US" sz="1400" b="1" dirty="0">
+                <a:solidFill>
+                  <a:srgbClr val="1E1B4B"/>
+                </a:solidFill>
+              </a:rPr>
+              <a:t>Services + access policies</a:t>
+            </a:r>
+            <a:endParaRPr lang="en-US" sz="1400" dirty="0"/>
+          </a:p>
+        </p:txBody>
+      </p:sp>
+      <p:sp>
+        <p:nvSpPr>
+          <p:cNvPr id="22" name="diagram arrow 9"/>
+          <p:cNvSpPr/>
+          <p:nvPr/>
+        </p:nvSpPr>
+        <p:spPr>
+          <a:xfrm>
+            <a:off x="5669280" y="4654296"/>
+            <a:ext cx="914" cy="274320"/>
+          </a:xfrm>
+          <a:prstGeom prst="line">
+            <a:avLst/>
+          </a:prstGeom>
+          <a:noFill/>
+          <a:ln w="22225">
+            <a:solidFill>
+              <a:srgbClr val="64748B"/>
+            </a:solidFill>
+            <a:prstDash val="solid"/>
+            <a:tailEnd type="triangle"/>
+          </a:ln>
+        </p:spPr>
+      </p:sp>
+      <p:sp>
+        <p:nvSpPr>
+          <p:cNvPr id="23" name="diagram shape 10"/>
+          <p:cNvSpPr/>
+          <p:nvPr/>
+        </p:nvSpPr>
+        <p:spPr>
+          <a:xfrm>
+            <a:off x="3611880" y="4928616"/>
+            <a:ext cx="4114800" cy="713232"/>
+          </a:xfrm>
+          <a:prstGeom prst="roundRect">
+            <a:avLst>
+              <a:gd name="adj" fmla="val 12821"/>
+            </a:avLst>
+          </a:prstGeom>
+          <a:solidFill>
+            <a:srgbClr val="FFFFFF"/>
+          </a:solidFill>
+          <a:ln w="19050">
+            <a:solidFill>
+              <a:srgbClr val="CBD5E1"/>
+            </a:solidFill>
+            <a:prstDash val="solid"/>
+          </a:ln>
+        </p:spPr>
+      </p:sp>
+      <p:sp>
+        <p:nvSpPr>
+          <p:cNvPr id="24" name="diagram label 10"/>
+          <p:cNvSpPr txBox="1"/>
+          <p:nvPr/>
+        </p:nvSpPr>
+        <p:spPr>
+          <a:xfrm>
+            <a:off x="3703320" y="4928616"/>
+            <a:ext cx="3931920" cy="713232"/>
+          </a:xfrm>
+          <a:prstGeom prst="rect">
+            <a:avLst/>
+          </a:prstGeom>
+          <a:noFill/>
+          <a:ln/>
+        </p:spPr>
+        <p:txBody>
+          <a:bodyPr wrap="square" lIns="0" tIns="0" rIns="0" bIns="0" rtlCol="0" anchor="ctr"/>
+          <a:lstStyle/>
+          <a:p>
+            <a:pPr algn="ctr" indent="0" marL="0">
+              <a:buNone/>
+            </a:pPr>
+            <a:r>
+              <a:rPr lang="en-US" sz="1400" b="1" dirty="0">
+                <a:solidFill>
+                  <a:srgbClr val="0F172A"/>
+                </a:solidFill>
+              </a:rPr>
+              <a:t>Repositories (Prisma)</a:t>
+            </a:r>
+            <a:endParaRPr lang="en-US" sz="1400" dirty="0"/>
+          </a:p>
+        </p:txBody>
+      </p:sp>
+      <p:sp>
+        <p:nvSpPr>
+          <p:cNvPr id="25" name="diagram arrow 11"/>
+          <p:cNvSpPr/>
+          <p:nvPr/>
+        </p:nvSpPr>
+        <p:spPr>
+          <a:xfrm>
+            <a:off x="2560320" y="3886200"/>
+            <a:ext cx="1051560" cy="914"/>
+          </a:xfrm>
+          <a:prstGeom prst="line">
+            <a:avLst/>
+          </a:prstGeom>
+          <a:noFill/>
+          <a:ln w="22225">
+            <a:solidFill>
+              <a:srgbClr val="64748B"/>
+            </a:solidFill>
+            <a:prstDash val="solid"/>
+            <a:tailEnd type="triangle"/>
+          </a:ln>
+        </p:spPr>
+      </p:sp>
+      <p:sp>
+        <p:nvSpPr>
+          <p:cNvPr id="26" name="diagram note 12"/>
+          <p:cNvSpPr txBox="1"/>
+          <p:nvPr/>
+        </p:nvSpPr>
+        <p:spPr>
+          <a:xfrm>
+            <a:off x="2578608" y="3950208"/>
+            <a:ext cx="658368" cy="292608"/>
+          </a:xfrm>
+          <a:prstGeom prst="rect">
+            <a:avLst/>
+          </a:prstGeom>
+          <a:noFill/>
+          <a:ln/>
+        </p:spPr>
+        <p:txBody>
+          <a:bodyPr wrap="square" lIns="0" tIns="0" rIns="0" bIns="0" rtlCol="0" anchor="ctr"/>
+          <a:lstStyle/>
+          <a:p>
+            <a:pPr algn="ctr" indent="0" marL="0">
+              <a:buNone/>
+            </a:pPr>
+            <a:r>
+              <a:rPr lang="en-US" sz="1100" dirty="0">
+                <a:solidFill>
+                  <a:srgbClr val="475569"/>
+                </a:solidFill>
+              </a:rPr>
+              <a:t>HTTPS</a:t>
+            </a:r>
+            <a:endParaRPr lang="en-US" sz="1100" dirty="0"/>
+          </a:p>
+        </p:txBody>
+      </p:sp>
+      <p:sp>
+        <p:nvSpPr>
+          <p:cNvPr id="27" name="diagram note 13"/>
+          <p:cNvSpPr txBox="1"/>
+          <p:nvPr/>
+        </p:nvSpPr>
+        <p:spPr>
+          <a:xfrm>
+            <a:off x="2578608" y="4187952"/>
+            <a:ext cx="658368" cy="292608"/>
+          </a:xfrm>
+          <a:prstGeom prst="rect">
+            <a:avLst/>
+          </a:prstGeom>
+          <a:noFill/>
+          <a:ln/>
+        </p:spPr>
+        <p:txBody>
+          <a:bodyPr wrap="square" lIns="0" tIns="0" rIns="0" bIns="0" rtlCol="0" anchor="ctr"/>
+          <a:lstStyle/>
+          <a:p>
+            <a:pPr algn="ctr" indent="0" marL="0">
+              <a:buNone/>
+            </a:pPr>
+            <a:r>
+              <a:rPr lang="en-US" sz="1100" dirty="0">
+                <a:solidFill>
+                  <a:srgbClr val="475569"/>
+                </a:solidFill>
+              </a:rPr>
+              <a:t>+ cookie</a:t>
+            </a:r>
+            <a:endParaRPr lang="en-US" sz="1100" dirty="0"/>
+          </a:p>
+        </p:txBody>
+      </p:sp>
+      <p:sp>
+        <p:nvSpPr>
+          <p:cNvPr id="28" name="diagram shape 14"/>
+          <p:cNvSpPr/>
+          <p:nvPr/>
+        </p:nvSpPr>
+        <p:spPr>
+          <a:xfrm>
+            <a:off x="8732520" y="1417320"/>
+            <a:ext cx="2926080" cy="1737360"/>
+          </a:xfrm>
+          <a:prstGeom prst="cloud">
+            <a:avLst/>
+          </a:prstGeom>
+          <a:solidFill>
+            <a:srgbClr val="E0F2F1"/>
+          </a:solidFill>
+          <a:ln w="19050">
+            <a:solidFill>
+              <a:srgbClr val="0D9488"/>
+            </a:solidFill>
+            <a:prstDash val="solid"/>
+          </a:ln>
+        </p:spPr>
+      </p:sp>
+      <p:sp>
+        <p:nvSpPr>
+          <p:cNvPr id="29" name="diagram label 14"/>
+          <p:cNvSpPr txBox="1"/>
+          <p:nvPr/>
+        </p:nvSpPr>
+        <p:spPr>
+          <a:xfrm>
+            <a:off x="8823960" y="1417320"/>
+            <a:ext cx="2743200" cy="1737360"/>
+          </a:xfrm>
+          <a:prstGeom prst="rect">
+            <a:avLst/>
+          </a:prstGeom>
+          <a:noFill/>
+          <a:ln/>
+        </p:spPr>
+        <p:txBody>
+          <a:bodyPr wrap="square" lIns="0" tIns="0" rIns="0" bIns="0" rtlCol="0" anchor="ctr"/>
+          <a:lstStyle/>
+          <a:p>
+            <a:pPr algn="ctr" indent="0" marL="0">
+              <a:buNone/>
+            </a:pPr>
+            <a:r>
+              <a:rPr lang="en-US" sz="1400" b="1" dirty="0">
+                <a:solidFill>
+                  <a:srgbClr val="134E4A"/>
+                </a:solidFill>
+              </a:rPr>
+              <a:t>Groq AI</a:t>
+            </a:r>
+            <a:endParaRPr lang="en-US" sz="1400" dirty="0"/>
+          </a:p>
+          <a:p>
+            <a:pPr algn="ctr" indent="0" marL="0">
+              <a:buNone/>
+            </a:pPr>
+            <a:r>
+              <a:rPr lang="en-US" sz="1400" b="1" dirty="0">
+                <a:solidFill>
+                  <a:srgbClr val="134E4A"/>
+                </a:solidFill>
+              </a:rPr>
+              <a:t>GPT-OSS 120B / 20B</a:t>
+            </a:r>
+            <a:endParaRPr lang="en-US" sz="1400" dirty="0"/>
+          </a:p>
+        </p:txBody>
+      </p:sp>
+      <p:sp>
+        <p:nvSpPr>
+          <p:cNvPr id="30" name="diagram shape 15"/>
+          <p:cNvSpPr/>
+          <p:nvPr/>
+        </p:nvSpPr>
+        <p:spPr>
+          <a:xfrm>
+            <a:off x="9006840" y="4114800"/>
+            <a:ext cx="2377440" cy="1828800"/>
+          </a:xfrm>
+          <a:prstGeom prst="can">
+            <a:avLst/>
+          </a:prstGeom>
+          <a:solidFill>
+            <a:srgbClr val="E0F2F1"/>
+          </a:solidFill>
+          <a:ln w="19050">
+            <a:solidFill>
+              <a:srgbClr val="0D9488"/>
+            </a:solidFill>
+            <a:prstDash val="solid"/>
+          </a:ln>
+        </p:spPr>
+      </p:sp>
+      <p:sp>
+        <p:nvSpPr>
+          <p:cNvPr id="31" name="diagram label 15"/>
+          <p:cNvSpPr txBox="1"/>
+          <p:nvPr/>
+        </p:nvSpPr>
+        <p:spPr>
+          <a:xfrm>
+            <a:off x="9098280" y="4434840"/>
+            <a:ext cx="2194560" cy="1508760"/>
+          </a:xfrm>
+          <a:prstGeom prst="rect">
+            <a:avLst/>
+          </a:prstGeom>
+          <a:noFill/>
+          <a:ln/>
+        </p:spPr>
+        <p:txBody>
+          <a:bodyPr wrap="square" lIns="0" tIns="0" rIns="0" bIns="0" rtlCol="0" anchor="ctr"/>
+          <a:lstStyle/>
+          <a:p>
+            <a:pPr algn="ctr" indent="0" marL="0">
+              <a:buNone/>
+            </a:pPr>
+            <a:r>
+              <a:rPr lang="en-US" sz="1500" b="1" dirty="0">
+                <a:solidFill>
+                  <a:srgbClr val="134E4A"/>
+                </a:solidFill>
+              </a:rPr>
+              <a:t>PostgreSQL</a:t>
+            </a:r>
+            <a:endParaRPr lang="en-US" sz="1500" dirty="0"/>
+          </a:p>
+          <a:p>
+            <a:pPr algn="ctr" indent="0" marL="0">
+              <a:buNone/>
+            </a:pPr>
+            <a:r>
+              <a:rPr lang="en-US" sz="1500" b="1" dirty="0">
+                <a:solidFill>
+                  <a:srgbClr val="134E4A"/>
+                </a:solidFill>
+              </a:rPr>
+              <a:t>Aiven</a:t>
+            </a:r>
+            <a:endParaRPr lang="en-US" sz="1500" dirty="0"/>
+          </a:p>
+        </p:txBody>
+      </p:sp>
+      <p:sp>
+        <p:nvSpPr>
+          <p:cNvPr id="32" name="diagram arrow 16"/>
+          <p:cNvSpPr/>
+          <p:nvPr/>
+        </p:nvSpPr>
+        <p:spPr>
+          <a:xfrm>
+            <a:off x="7726680" y="4297680"/>
+            <a:ext cx="685800" cy="914"/>
+          </a:xfrm>
+          <a:prstGeom prst="line">
+            <a:avLst/>
+          </a:prstGeom>
+          <a:noFill/>
+          <a:ln w="22225">
+            <a:solidFill>
+              <a:srgbClr val="64748B"/>
+            </a:solidFill>
+            <a:prstDash val="solid"/>
+          </a:ln>
+        </p:spPr>
+      </p:sp>
+      <p:sp>
+        <p:nvSpPr>
+          <p:cNvPr id="33" name="diagram arrow 17"/>
+          <p:cNvSpPr/>
+          <p:nvPr/>
+        </p:nvSpPr>
+        <p:spPr>
+          <a:xfrm flipV="1">
+            <a:off x="8412480" y="2286000"/>
+            <a:ext cx="914" cy="2011680"/>
+          </a:xfrm>
+          <a:prstGeom prst="line">
+            <a:avLst/>
+          </a:prstGeom>
+          <a:noFill/>
+          <a:ln w="22225">
+            <a:solidFill>
+              <a:srgbClr val="64748B"/>
+            </a:solidFill>
+            <a:prstDash val="solid"/>
+          </a:ln>
+        </p:spPr>
+      </p:sp>
+      <p:sp>
+        <p:nvSpPr>
+          <p:cNvPr id="34" name="diagram arrow 18"/>
+          <p:cNvSpPr/>
+          <p:nvPr/>
+        </p:nvSpPr>
+        <p:spPr>
+          <a:xfrm>
+            <a:off x="8412480" y="2286000"/>
+            <a:ext cx="365760" cy="914"/>
+          </a:xfrm>
+          <a:prstGeom prst="line">
+            <a:avLst/>
+          </a:prstGeom>
+          <a:noFill/>
+          <a:ln w="22225">
+            <a:solidFill>
+              <a:srgbClr val="64748B"/>
+            </a:solidFill>
+            <a:prstDash val="solid"/>
+            <a:tailEnd type="triangle"/>
+          </a:ln>
+        </p:spPr>
+      </p:sp>
+      <p:sp>
+        <p:nvSpPr>
+          <p:cNvPr id="35" name="diagram note 19"/>
+          <p:cNvSpPr txBox="1"/>
+          <p:nvPr/>
+        </p:nvSpPr>
+        <p:spPr>
+          <a:xfrm>
+            <a:off x="8485632" y="3246120"/>
+            <a:ext cx="1188720" cy="292608"/>
+          </a:xfrm>
+          <a:prstGeom prst="rect">
+            <a:avLst/>
+          </a:prstGeom>
+          <a:noFill/>
+          <a:ln/>
+        </p:spPr>
+        <p:txBody>
+          <a:bodyPr wrap="square" lIns="0" tIns="0" rIns="0" bIns="0" rtlCol="0" anchor="ctr"/>
+          <a:lstStyle/>
+          <a:p>
+            <a:pPr algn="l" indent="0" marL="0">
+              <a:buNone/>
+            </a:pPr>
+            <a:r>
+              <a:rPr lang="en-US" sz="1100" dirty="0">
+                <a:solidFill>
+                  <a:srgbClr val="475569"/>
+                </a:solidFill>
+              </a:rPr>
+              <a:t>JSON mode</a:t>
+            </a:r>
+            <a:endParaRPr lang="en-US" sz="1100" dirty="0"/>
+          </a:p>
+        </p:txBody>
+      </p:sp>
+      <p:sp>
+        <p:nvSpPr>
+          <p:cNvPr id="36" name="diagram arrow 20"/>
+          <p:cNvSpPr/>
+          <p:nvPr/>
+        </p:nvSpPr>
+        <p:spPr>
+          <a:xfrm>
+            <a:off x="7726680" y="5285232"/>
+            <a:ext cx="1280160" cy="914"/>
+          </a:xfrm>
+          <a:prstGeom prst="line">
+            <a:avLst/>
+          </a:prstGeom>
+          <a:noFill/>
+          <a:ln w="22225">
+            <a:solidFill>
+              <a:srgbClr val="64748B"/>
+            </a:solidFill>
+            <a:prstDash val="solid"/>
+            <a:tailEnd type="triangle"/>
+          </a:ln>
+        </p:spPr>
+      </p:sp>
+      <p:sp>
+        <p:nvSpPr>
+          <p:cNvPr id="37" name="diagram note 21"/>
+          <p:cNvSpPr txBox="1"/>
+          <p:nvPr/>
+        </p:nvSpPr>
+        <p:spPr>
+          <a:xfrm>
+            <a:off x="8156448" y="5330952"/>
+            <a:ext cx="822960" cy="292608"/>
+          </a:xfrm>
+          <a:prstGeom prst="rect">
+            <a:avLst/>
+          </a:prstGeom>
+          <a:noFill/>
+          <a:ln/>
+        </p:spPr>
+        <p:txBody>
+          <a:bodyPr wrap="square" lIns="0" tIns="0" rIns="0" bIns="0" rtlCol="0" anchor="ctr"/>
+          <a:lstStyle/>
+          <a:p>
+            <a:pPr algn="ctr" indent="0" marL="0">
+              <a:buNone/>
+            </a:pPr>
+            <a:r>
+              <a:rPr lang="en-US" sz="1100" dirty="0">
+                <a:solidFill>
+                  <a:srgbClr val="475569"/>
+                </a:solidFill>
+              </a:rPr>
+              <a:t>SQL · SSL</a:t>
+            </a:r>
+            <a:endParaRPr lang="en-US" sz="1100" dirty="0"/>
+          </a:p>
+        </p:txBody>
+      </p:sp>
+      <p:sp>
+        <p:nvSpPr>
+          <p:cNvPr id="25" name="Slide Number Placeholder 0"/>
+          <p:cNvSpPr>
+            <a:spLocks noGrp="1"/>
+          </p:cNvSpPr>
+          <p:nvPr>
+            <p:ph type="sldNum" sz="quarter" idx="4294967295"/>
+          </p:nvPr>
+        </p:nvSpPr>
+        <p:spPr>
+          <a:xfrm>
+            <a:off x="11094415" y="6400800"/>
+            <a:ext cx="548640" cy="274320"/>
+          </a:xfrm>
+          <a:prstGeom prst="rect">
+            <a:avLst/>
+          </a:prstGeom>
+          <a:extLst>
+            <a:ext uri="{C572A759-6A51-4108-AA02-DFA0A04FC94B}">
+              <ma14:wrappingTextBoxFlag xmlns:ma14="http://schemas.microsoft.com/office/mac/drawingml/2011/main" val="0"/>
+            </a:ext>
+          </a:extLst>
+        </p:spPr>
+        <p:txBody>
+          <a:bodyPr/>
+          <a:lstStyle>
+            <a:lvl1pPr>
+              <a:defRPr sz="1000">
+                <a:solidFill>
+                  <a:srgbClr val="64748B"/>
+                </a:solidFill>
+              </a:defRPr>
+            </a:lvl1pPr>
+          </a:lstStyle>
+          <a:p>
+            <a:pPr algn="r"/>
+            <a:fld id="{F7021451-1387-4CA6-816F-3879F97B5CBC}" type="slidenum">
+              <a:rPr b="0" lang="en-US"/>
+              <a:t>11</a:t>
+            </a:fld>
+            <a:endParaRPr lang="en-US"/>
+          </a:p>
+        </p:txBody>
+      </p:sp>
+    </p:spTree>
+  </p:cSld>
+  <p:clrMapOvr>
+    <a:masterClrMapping/>
+  </p:clrMapOvr>
+</p:sld>
+</file>
+
+<file path=ppt/slides/slide12.xml><?xml version="1.0" encoding="utf-8"?>
+<p:sld xmlns:a="http://schemas.openxmlformats.org/drawingml/2006/main" xmlns:r="http://schemas.openxmlformats.org/officeDocument/2006/relationships" xmlns:p="http://schemas.openxmlformats.org/presentationml/2006/main">
+  <p:cSld name="Slide 12">
+    <p:spTree>
+      <p:nvGrpSpPr>
+        <p:cNvPr id="1" name=""/>
+        <p:cNvGrpSpPr/>
+        <p:nvPr/>
+      </p:nvGrpSpPr>
+      <p:grpSpPr>
+        <a:xfrm>
+          <a:off x="0" y="0"/>
+          <a:ext cx="0" cy="0"/>
+          <a:chOff x="0" y="0"/>
+          <a:chExt cx="0" cy="0"/>
+        </a:xfrm>
+      </p:grpSpPr>
+      <p:sp>
+        <p:nvSpPr>
+          <p:cNvPr id="2" name="Text 0"/>
+          <p:cNvSpPr/>
+          <p:nvPr>
+            <p:ph idx="100" type="title" hasCustomPrompt="1"/>
+          </p:nvPr>
+        </p:nvSpPr>
+        <p:spPr>
+          <a:xfrm>
+            <a:off x="548640" y="347472"/>
+            <a:ext cx="11094415" cy="731520"/>
+          </a:xfrm>
+          <a:prstGeom prst="rect">
+            <a:avLst/>
+          </a:prstGeom>
+          <a:noFill/>
+          <a:ln/>
+        </p:spPr>
+        <p:txBody>
+          <a:bodyPr wrap="square" lIns="0" tIns="0" rIns="0" bIns="0" rtlCol="0" anchor="ctr"/>
+          <a:lstStyle/>
+          <a:p>
+            <a:pPr algn="l" indent="0" marL="0">
+              <a:buNone/>
+            </a:pPr>
+            <a:r>
+              <a:rPr lang="en-US" sz="3400" b="1" dirty="0">
+                <a:solidFill>
+                  <a:schemeClr val="tx1"/>
+                </a:solidFill>
+              </a:rPr>
+              <a:t>Flowchart: transcript to tasks</a:t>
+            </a:r>
+            <a:endParaRPr lang="en-US" sz="3400" dirty="0"/>
+          </a:p>
+        </p:txBody>
+      </p:sp>
+      <p:sp>
+        <p:nvSpPr>
+          <p:cNvPr id="3" name="diagram shape 22"/>
+          <p:cNvSpPr/>
+          <p:nvPr/>
+        </p:nvSpPr>
+        <p:spPr>
+          <a:xfrm>
+            <a:off x="548640" y="1874520"/>
+            <a:ext cx="2240280" cy="914400"/>
+          </a:xfrm>
+          <a:prstGeom prst="roundRect">
+            <a:avLst>
+              <a:gd name="adj" fmla="val 10000"/>
+            </a:avLst>
+          </a:prstGeom>
+          <a:solidFill>
+            <a:srgbClr val="FFFFFF"/>
+          </a:solidFill>
+          <a:ln w="19050">
+            <a:solidFill>
+              <a:srgbClr val="CBD5E1"/>
+            </a:solidFill>
+            <a:prstDash val="solid"/>
+          </a:ln>
+        </p:spPr>
+      </p:sp>
+      <p:sp>
+        <p:nvSpPr>
+          <p:cNvPr id="4" name="diagram label 22"/>
+          <p:cNvSpPr txBox="1"/>
+          <p:nvPr/>
+        </p:nvSpPr>
+        <p:spPr>
+          <a:xfrm>
+            <a:off x="640080" y="1874520"/>
+            <a:ext cx="2057400" cy="914400"/>
+          </a:xfrm>
+          <a:prstGeom prst="rect">
+            <a:avLst/>
+          </a:prstGeom>
+          <a:noFill/>
+          <a:ln/>
+        </p:spPr>
+        <p:txBody>
+          <a:bodyPr wrap="square" lIns="0" tIns="0" rIns="0" bIns="0" rtlCol="0" anchor="ctr"/>
+          <a:lstStyle/>
+          <a:p>
+            <a:pPr algn="ctr" indent="0" marL="0">
+              <a:buNone/>
+            </a:pPr>
+            <a:r>
+              <a:rPr lang="en-US" sz="1400" b="1" dirty="0">
+                <a:solidFill>
+                  <a:srgbClr val="0F172A"/>
+                </a:solidFill>
+              </a:rPr>
+              <a:t>Admin submits</a:t>
+            </a:r>
+            <a:endParaRPr lang="en-US" sz="1400" dirty="0"/>
+          </a:p>
+          <a:p>
+            <a:pPr algn="ctr" indent="0" marL="0">
+              <a:buNone/>
+            </a:pPr>
+            <a:r>
+              <a:rPr lang="en-US" sz="1400" b="1" dirty="0">
+                <a:solidFill>
+                  <a:srgbClr val="0F172A"/>
+                </a:solidFill>
+              </a:rPr>
+              <a:t>transcript</a:t>
+            </a:r>
+            <a:endParaRPr lang="en-US" sz="1400" dirty="0"/>
+          </a:p>
+        </p:txBody>
+      </p:sp>
+      <p:sp>
+        <p:nvSpPr>
+          <p:cNvPr id="5" name="diagram shape 23"/>
+          <p:cNvSpPr/>
+          <p:nvPr/>
+        </p:nvSpPr>
+        <p:spPr>
+          <a:xfrm>
+            <a:off x="3500018" y="1874520"/>
+            <a:ext cx="2240280" cy="914400"/>
+          </a:xfrm>
+          <a:prstGeom prst="roundRect">
+            <a:avLst>
+              <a:gd name="adj" fmla="val 10000"/>
+            </a:avLst>
+          </a:prstGeom>
+          <a:solidFill>
+            <a:srgbClr val="FFFFFF"/>
+          </a:solidFill>
+          <a:ln w="19050">
+            <a:solidFill>
+              <a:srgbClr val="CBD5E1"/>
+            </a:solidFill>
+            <a:prstDash val="solid"/>
+          </a:ln>
+        </p:spPr>
+      </p:sp>
+      <p:sp>
+        <p:nvSpPr>
+          <p:cNvPr id="6" name="diagram label 23"/>
+          <p:cNvSpPr txBox="1"/>
+          <p:nvPr/>
+        </p:nvSpPr>
+        <p:spPr>
+          <a:xfrm>
+            <a:off x="3591458" y="1874520"/>
+            <a:ext cx="2057400" cy="914400"/>
+          </a:xfrm>
+          <a:prstGeom prst="rect">
+            <a:avLst/>
+          </a:prstGeom>
+          <a:noFill/>
+          <a:ln/>
+        </p:spPr>
+        <p:txBody>
+          <a:bodyPr wrap="square" lIns="0" tIns="0" rIns="0" bIns="0" rtlCol="0" anchor="ctr"/>
+          <a:lstStyle/>
+          <a:p>
+            <a:pPr algn="ctr" indent="0" marL="0">
+              <a:buNone/>
+            </a:pPr>
+            <a:r>
+              <a:rPr lang="en-US" sz="1400" b="1" dirty="0">
+                <a:solidFill>
+                  <a:srgbClr val="0F172A"/>
+                </a:solidFill>
+              </a:rPr>
+              <a:t>Load team directory</a:t>
+            </a:r>
+            <a:endParaRPr lang="en-US" sz="1400" dirty="0"/>
+          </a:p>
+          <a:p>
+            <a:pPr algn="ctr" indent="0" marL="0">
+              <a:buNone/>
+            </a:pPr>
+            <a:r>
+              <a:rPr lang="en-US" sz="1400" b="1" dirty="0">
+                <a:solidFill>
+                  <a:srgbClr val="0F172A"/>
+                </a:solidFill>
+              </a:rPr>
+              <a:t>(no passwords)</a:t>
+            </a:r>
+            <a:endParaRPr lang="en-US" sz="1400" dirty="0"/>
+          </a:p>
+        </p:txBody>
+      </p:sp>
+      <p:sp>
+        <p:nvSpPr>
+          <p:cNvPr id="7" name="diagram shape 24"/>
+          <p:cNvSpPr/>
+          <p:nvPr/>
+        </p:nvSpPr>
+        <p:spPr>
+          <a:xfrm>
+            <a:off x="6451397" y="1874520"/>
+            <a:ext cx="2240280" cy="914400"/>
+          </a:xfrm>
+          <a:prstGeom prst="roundRect">
+            <a:avLst>
+              <a:gd name="adj" fmla="val 10000"/>
+            </a:avLst>
+          </a:prstGeom>
+          <a:solidFill>
+            <a:srgbClr val="EEF2FF"/>
+          </a:solidFill>
+          <a:ln w="19050">
+            <a:solidFill>
+              <a:srgbClr val="4F46E5"/>
+            </a:solidFill>
+            <a:prstDash val="solid"/>
+          </a:ln>
+        </p:spPr>
+      </p:sp>
+      <p:sp>
+        <p:nvSpPr>
+          <p:cNvPr id="8" name="diagram label 24"/>
+          <p:cNvSpPr txBox="1"/>
+          <p:nvPr/>
+        </p:nvSpPr>
+        <p:spPr>
+          <a:xfrm>
+            <a:off x="6542837" y="1874520"/>
+            <a:ext cx="2057400" cy="914400"/>
+          </a:xfrm>
+          <a:prstGeom prst="rect">
+            <a:avLst/>
+          </a:prstGeom>
+          <a:noFill/>
+          <a:ln/>
+        </p:spPr>
+        <p:txBody>
+          <a:bodyPr wrap="square" lIns="0" tIns="0" rIns="0" bIns="0" rtlCol="0" anchor="ctr"/>
+          <a:lstStyle/>
+          <a:p>
+            <a:pPr algn="ctr" indent="0" marL="0">
+              <a:buNone/>
+            </a:pPr>
+            <a:r>
+              <a:rPr lang="en-US" sz="1400" b="1" dirty="0">
+                <a:solidFill>
+                  <a:srgbClr val="1E1B4B"/>
+                </a:solidFill>
+              </a:rPr>
+              <a:t>Groq · GPT-OSS 120B</a:t>
+            </a:r>
+            <a:endParaRPr lang="en-US" sz="1400" dirty="0"/>
+          </a:p>
+          <a:p>
+            <a:pPr algn="ctr" indent="0" marL="0">
+              <a:buNone/>
+            </a:pPr>
+            <a:r>
+              <a:rPr lang="en-US" sz="1400" b="1" dirty="0">
+                <a:solidFill>
+                  <a:srgbClr val="1E1B4B"/>
+                </a:solidFill>
+              </a:rPr>
+              <a:t>JSON output</a:t>
+            </a:r>
+            <a:endParaRPr lang="en-US" sz="1400" dirty="0"/>
+          </a:p>
+        </p:txBody>
+      </p:sp>
+      <p:sp>
+        <p:nvSpPr>
+          <p:cNvPr id="9" name="diagram shape 25"/>
+          <p:cNvSpPr/>
+          <p:nvPr/>
+        </p:nvSpPr>
+        <p:spPr>
+          <a:xfrm>
+            <a:off x="9402775" y="1737360"/>
+            <a:ext cx="2240280" cy="1188720"/>
+          </a:xfrm>
+          <a:prstGeom prst="diamond">
+            <a:avLst/>
+          </a:prstGeom>
+          <a:solidFill>
+            <a:srgbClr val="EEF2FF"/>
+          </a:solidFill>
+          <a:ln w="19050">
+            <a:solidFill>
+              <a:srgbClr val="4F46E5"/>
+            </a:solidFill>
+            <a:prstDash val="solid"/>
+          </a:ln>
+        </p:spPr>
+      </p:sp>
+      <p:sp>
+        <p:nvSpPr>
+          <p:cNvPr id="10" name="diagram label 25"/>
+          <p:cNvSpPr txBox="1"/>
+          <p:nvPr/>
+        </p:nvSpPr>
+        <p:spPr>
+          <a:xfrm>
+            <a:off x="9850831" y="1737360"/>
+            <a:ext cx="1344168" cy="1188720"/>
+          </a:xfrm>
+          <a:prstGeom prst="rect">
+            <a:avLst/>
+          </a:prstGeom>
+          <a:noFill/>
+          <a:ln/>
+        </p:spPr>
+        <p:txBody>
+          <a:bodyPr wrap="square" lIns="0" tIns="0" rIns="0" bIns="0" rtlCol="0" anchor="ctr"/>
+          <a:lstStyle/>
+          <a:p>
+            <a:pPr algn="ctr" indent="0" marL="0">
+              <a:buNone/>
+            </a:pPr>
+            <a:r>
+              <a:rPr lang="en-US" sz="1400" b="1" dirty="0">
+                <a:solidFill>
+                  <a:srgbClr val="1E1B4B"/>
+                </a:solidFill>
+              </a:rPr>
+              <a:t>Valid JSON?</a:t>
+            </a:r>
+            <a:endParaRPr lang="en-US" sz="1400" dirty="0"/>
+          </a:p>
+        </p:txBody>
+      </p:sp>
+      <p:sp>
+        <p:nvSpPr>
+          <p:cNvPr id="11" name="diagram arrow 26"/>
+          <p:cNvSpPr/>
+          <p:nvPr/>
+        </p:nvSpPr>
+        <p:spPr>
+          <a:xfrm>
+            <a:off x="2788920" y="2331720"/>
+            <a:ext cx="711098" cy="914"/>
+          </a:xfrm>
+          <a:prstGeom prst="line">
+            <a:avLst/>
+          </a:prstGeom>
+          <a:noFill/>
+          <a:ln w="22225">
+            <a:solidFill>
+              <a:srgbClr val="64748B"/>
+            </a:solidFill>
+            <a:prstDash val="solid"/>
+            <a:tailEnd type="triangle"/>
+          </a:ln>
+        </p:spPr>
+      </p:sp>
+      <p:sp>
+        <p:nvSpPr>
+          <p:cNvPr id="12" name="diagram arrow 27"/>
+          <p:cNvSpPr/>
+          <p:nvPr/>
+        </p:nvSpPr>
+        <p:spPr>
+          <a:xfrm>
+            <a:off x="5740298" y="2331720"/>
+            <a:ext cx="711098" cy="914"/>
+          </a:xfrm>
+          <a:prstGeom prst="line">
+            <a:avLst/>
+          </a:prstGeom>
+          <a:noFill/>
+          <a:ln w="22225">
+            <a:solidFill>
+              <a:srgbClr val="64748B"/>
+            </a:solidFill>
+            <a:prstDash val="solid"/>
+            <a:tailEnd type="triangle"/>
+          </a:ln>
+        </p:spPr>
+      </p:sp>
+      <p:sp>
+        <p:nvSpPr>
+          <p:cNvPr id="13" name="diagram arrow 28"/>
+          <p:cNvSpPr/>
+          <p:nvPr/>
+        </p:nvSpPr>
+        <p:spPr>
+          <a:xfrm>
+            <a:off x="8691677" y="2331720"/>
+            <a:ext cx="711098" cy="914"/>
+          </a:xfrm>
+          <a:prstGeom prst="line">
+            <a:avLst/>
+          </a:prstGeom>
+          <a:noFill/>
+          <a:ln w="22225">
+            <a:solidFill>
+              <a:srgbClr val="64748B"/>
+            </a:solidFill>
+            <a:prstDash val="solid"/>
+            <a:tailEnd type="triangle"/>
+          </a:ln>
+        </p:spPr>
+      </p:sp>
+      <p:sp>
+        <p:nvSpPr>
+          <p:cNvPr id="14" name="diagram arrow 29"/>
+          <p:cNvSpPr/>
+          <p:nvPr/>
+        </p:nvSpPr>
+        <p:spPr>
+          <a:xfrm flipV="1">
+            <a:off x="10522915" y="1417320"/>
+            <a:ext cx="914" cy="320040"/>
+          </a:xfrm>
+          <a:prstGeom prst="line">
+            <a:avLst/>
+          </a:prstGeom>
+          <a:noFill/>
+          <a:ln w="22225">
+            <a:solidFill>
+              <a:srgbClr val="64748B"/>
+            </a:solidFill>
+            <a:prstDash val="dash"/>
+          </a:ln>
+        </p:spPr>
+      </p:sp>
+      <p:sp>
+        <p:nvSpPr>
+          <p:cNvPr id="15" name="diagram arrow 30"/>
+          <p:cNvSpPr/>
+          <p:nvPr/>
+        </p:nvSpPr>
+        <p:spPr>
+          <a:xfrm flipH="1">
+            <a:off x="7571537" y="1417320"/>
+            <a:ext cx="2951378" cy="914"/>
+          </a:xfrm>
+          <a:prstGeom prst="line">
+            <a:avLst/>
+          </a:prstGeom>
+          <a:noFill/>
+          <a:ln w="22225">
+            <a:solidFill>
+              <a:srgbClr val="64748B"/>
+            </a:solidFill>
+            <a:prstDash val="dash"/>
+          </a:ln>
+        </p:spPr>
+      </p:sp>
+      <p:sp>
+        <p:nvSpPr>
+          <p:cNvPr id="16" name="diagram arrow 31"/>
+          <p:cNvSpPr/>
+          <p:nvPr/>
+        </p:nvSpPr>
+        <p:spPr>
+          <a:xfrm>
+            <a:off x="7571537" y="1417320"/>
+            <a:ext cx="914" cy="457200"/>
+          </a:xfrm>
+          <a:prstGeom prst="line">
+            <a:avLst/>
+          </a:prstGeom>
+          <a:noFill/>
+          <a:ln w="22225">
+            <a:solidFill>
+              <a:srgbClr val="64748B"/>
+            </a:solidFill>
+            <a:prstDash val="dash"/>
+            <a:tailEnd type="triangle"/>
+          </a:ln>
+        </p:spPr>
+      </p:sp>
+      <p:sp>
+        <p:nvSpPr>
+          <p:cNvPr id="17" name="diagram note 32"/>
+          <p:cNvSpPr txBox="1"/>
+          <p:nvPr/>
+        </p:nvSpPr>
+        <p:spPr>
+          <a:xfrm>
+            <a:off x="7662977" y="1133856"/>
+            <a:ext cx="2951378" cy="292608"/>
+          </a:xfrm>
+          <a:prstGeom prst="rect">
+            <a:avLst/>
+          </a:prstGeom>
+          <a:noFill/>
+          <a:ln/>
+        </p:spPr>
+        <p:txBody>
+          <a:bodyPr wrap="square" lIns="0" tIns="0" rIns="0" bIns="0" rtlCol="0" anchor="ctr"/>
+          <a:lstStyle/>
+          <a:p>
+            <a:pPr algn="ctr" indent="0" marL="0">
+              <a:buNone/>
+            </a:pPr>
+            <a:r>
+              <a:rPr lang="en-US" sz="1200" dirty="0">
+                <a:solidFill>
+                  <a:srgbClr val="B45309"/>
+                </a:solidFill>
+              </a:rPr>
+              <a:t>No: wait, retry, fallback 20B</a:t>
+            </a:r>
+            <a:endParaRPr lang="en-US" sz="1200" dirty="0"/>
+          </a:p>
+        </p:txBody>
+      </p:sp>
+      <p:sp>
+        <p:nvSpPr>
+          <p:cNvPr id="18" name="diagram shape 33"/>
+          <p:cNvSpPr/>
+          <p:nvPr/>
+        </p:nvSpPr>
+        <p:spPr>
+          <a:xfrm>
+            <a:off x="9402775" y="3611880"/>
+            <a:ext cx="2240280" cy="1188720"/>
+          </a:xfrm>
+          <a:prstGeom prst="diamond">
+            <a:avLst/>
+          </a:prstGeom>
+          <a:solidFill>
+            <a:srgbClr val="EEF2FF"/>
+          </a:solidFill>
+          <a:ln w="19050">
+            <a:solidFill>
+              <a:srgbClr val="4F46E5"/>
+            </a:solidFill>
+            <a:prstDash val="solid"/>
+          </a:ln>
+        </p:spPr>
+      </p:sp>
+      <p:sp>
+        <p:nvSpPr>
+          <p:cNvPr id="19" name="diagram label 33"/>
+          <p:cNvSpPr txBox="1"/>
+          <p:nvPr/>
+        </p:nvSpPr>
+        <p:spPr>
+          <a:xfrm>
+            <a:off x="9850831" y="3611880"/>
+            <a:ext cx="1344168" cy="1188720"/>
+          </a:xfrm>
+          <a:prstGeom prst="rect">
+            <a:avLst/>
+          </a:prstGeom>
+          <a:noFill/>
+          <a:ln/>
+        </p:spPr>
+        <p:txBody>
+          <a:bodyPr wrap="square" lIns="0" tIns="0" rIns="0" bIns="0" rtlCol="0" anchor="ctr"/>
+          <a:lstStyle/>
+          <a:p>
+            <a:pPr algn="ctr" indent="0" marL="0">
+              <a:buNone/>
+            </a:pPr>
+            <a:r>
+              <a:rPr lang="en-US" sz="1400" b="1" dirty="0">
+                <a:solidFill>
+                  <a:srgbClr val="1E1B4B"/>
+                </a:solidFill>
+              </a:rPr>
+              <a:t>Rules OK?</a:t>
+            </a:r>
+            <a:endParaRPr lang="en-US" sz="1400" dirty="0"/>
+          </a:p>
+        </p:txBody>
+      </p:sp>
+      <p:sp>
+        <p:nvSpPr>
+          <p:cNvPr id="20" name="diagram arrow 34"/>
+          <p:cNvSpPr/>
+          <p:nvPr/>
+        </p:nvSpPr>
+        <p:spPr>
+          <a:xfrm>
+            <a:off x="10522915" y="2926080"/>
+            <a:ext cx="914" cy="685800"/>
+          </a:xfrm>
+          <a:prstGeom prst="line">
+            <a:avLst/>
+          </a:prstGeom>
+          <a:noFill/>
+          <a:ln w="22225">
+            <a:solidFill>
+              <a:srgbClr val="64748B"/>
+            </a:solidFill>
+            <a:prstDash val="solid"/>
+            <a:tailEnd type="triangle"/>
+          </a:ln>
+        </p:spPr>
+      </p:sp>
+      <p:sp>
+        <p:nvSpPr>
+          <p:cNvPr id="21" name="diagram note 35"/>
+          <p:cNvSpPr txBox="1"/>
+          <p:nvPr/>
+        </p:nvSpPr>
+        <p:spPr>
+          <a:xfrm>
+            <a:off x="10596067" y="3017520"/>
+            <a:ext cx="457200" cy="292608"/>
+          </a:xfrm>
+          <a:prstGeom prst="rect">
+            <a:avLst/>
+          </a:prstGeom>
+          <a:noFill/>
+          <a:ln/>
+        </p:spPr>
+        <p:txBody>
+          <a:bodyPr wrap="square" lIns="0" tIns="0" rIns="0" bIns="0" rtlCol="0" anchor="ctr"/>
+          <a:lstStyle/>
+          <a:p>
+            <a:pPr algn="l" indent="0" marL="0">
+              <a:buNone/>
+            </a:pPr>
+            <a:r>
+              <a:rPr lang="en-US" sz="1200" b="1" dirty="0">
+                <a:solidFill>
+                  <a:srgbClr val="15803D"/>
+                </a:solidFill>
+              </a:rPr>
+              <a:t>Yes</a:t>
+            </a:r>
+            <a:endParaRPr lang="en-US" sz="1200" dirty="0"/>
+          </a:p>
+        </p:txBody>
+      </p:sp>
+      <p:sp>
+        <p:nvSpPr>
+          <p:cNvPr id="22" name="diagram shape 36"/>
+          <p:cNvSpPr/>
+          <p:nvPr/>
+        </p:nvSpPr>
+        <p:spPr>
+          <a:xfrm>
+            <a:off x="6451397" y="3749040"/>
+            <a:ext cx="2240280" cy="914400"/>
+          </a:xfrm>
+          <a:prstGeom prst="roundRect">
+            <a:avLst>
+              <a:gd name="adj" fmla="val 10000"/>
+            </a:avLst>
+          </a:prstGeom>
+          <a:solidFill>
+            <a:srgbClr val="EEF2FF"/>
+          </a:solidFill>
+          <a:ln w="19050">
+            <a:solidFill>
+              <a:srgbClr val="4F46E5"/>
+            </a:solidFill>
+            <a:prstDash val="solid"/>
+          </a:ln>
+        </p:spPr>
+      </p:sp>
+      <p:sp>
+        <p:nvSpPr>
+          <p:cNvPr id="23" name="diagram label 36"/>
+          <p:cNvSpPr txBox="1"/>
+          <p:nvPr/>
+        </p:nvSpPr>
+        <p:spPr>
+          <a:xfrm>
+            <a:off x="6542837" y="3749040"/>
+            <a:ext cx="2057400" cy="914400"/>
+          </a:xfrm>
+          <a:prstGeom prst="rect">
+            <a:avLst/>
+          </a:prstGeom>
+          <a:noFill/>
+          <a:ln/>
+        </p:spPr>
+        <p:txBody>
+          <a:bodyPr wrap="square" lIns="0" tIns="0" rIns="0" bIns="0" rtlCol="0" anchor="ctr"/>
+          <a:lstStyle/>
+          <a:p>
+            <a:pPr algn="ctr" indent="0" marL="0">
+              <a:buNone/>
+            </a:pPr>
+            <a:r>
+              <a:rPr lang="en-US" sz="1400" b="1" dirty="0">
+                <a:solidFill>
+                  <a:srgbClr val="1E1B4B"/>
+                </a:solidFill>
+              </a:rPr>
+              <a:t>One DB transaction</a:t>
+            </a:r>
+            <a:endParaRPr lang="en-US" sz="1400" dirty="0"/>
+          </a:p>
+          <a:p>
+            <a:pPr algn="ctr" indent="0" marL="0">
+              <a:buNone/>
+            </a:pPr>
+            <a:r>
+              <a:rPr lang="en-US" sz="1400" b="1" dirty="0">
+                <a:solidFill>
+                  <a:srgbClr val="1E1B4B"/>
+                </a:solidFill>
+              </a:rPr>
+              <a:t>clients · projects · tasks</a:t>
+            </a:r>
+            <a:endParaRPr lang="en-US" sz="1400" dirty="0"/>
+          </a:p>
+        </p:txBody>
+      </p:sp>
+      <p:sp>
+        <p:nvSpPr>
+          <p:cNvPr id="24" name="diagram shape 37"/>
+          <p:cNvSpPr/>
+          <p:nvPr/>
+        </p:nvSpPr>
+        <p:spPr>
+          <a:xfrm>
+            <a:off x="3500018" y="3749040"/>
+            <a:ext cx="2240280" cy="914400"/>
+          </a:xfrm>
+          <a:prstGeom prst="roundRect">
+            <a:avLst>
+              <a:gd name="adj" fmla="val 10000"/>
+            </a:avLst>
+          </a:prstGeom>
+          <a:solidFill>
+            <a:srgbClr val="DCFCE7"/>
+          </a:solidFill>
+          <a:ln w="19050">
+            <a:solidFill>
+              <a:srgbClr val="16A34A"/>
+            </a:solidFill>
+            <a:prstDash val="solid"/>
+          </a:ln>
+        </p:spPr>
+      </p:sp>
+      <p:sp>
+        <p:nvSpPr>
+          <p:cNvPr id="25" name="diagram label 37"/>
+          <p:cNvSpPr txBox="1"/>
+          <p:nvPr/>
+        </p:nvSpPr>
+        <p:spPr>
+          <a:xfrm>
+            <a:off x="3591458" y="3749040"/>
+            <a:ext cx="2057400" cy="914400"/>
+          </a:xfrm>
+          <a:prstGeom prst="rect">
+            <a:avLst/>
+          </a:prstGeom>
+          <a:noFill/>
+          <a:ln/>
+        </p:spPr>
+        <p:txBody>
+          <a:bodyPr wrap="square" lIns="0" tIns="0" rIns="0" bIns="0" rtlCol="0" anchor="ctr"/>
+          <a:lstStyle/>
+          <a:p>
+            <a:pPr algn="ctr" indent="0" marL="0">
+              <a:buNone/>
+            </a:pPr>
+            <a:r>
+              <a:rPr lang="en-US" sz="1400" b="1" dirty="0">
+                <a:solidFill>
+                  <a:srgbClr val="14532D"/>
+                </a:solidFill>
+              </a:rPr>
+              <a:t>201 Created</a:t>
+            </a:r>
+            <a:endParaRPr lang="en-US" sz="1400" dirty="0"/>
+          </a:p>
+          <a:p>
+            <a:pPr algn="ctr" indent="0" marL="0">
+              <a:buNone/>
+            </a:pPr>
+            <a:r>
+              <a:rPr lang="en-US" sz="1400" b="1" dirty="0">
+                <a:solidFill>
+                  <a:srgbClr val="14532D"/>
+                </a:solidFill>
+              </a:rPr>
+              <a:t>3 projects · 12 tasks</a:t>
+            </a:r>
+            <a:endParaRPr lang="en-US" sz="1400" dirty="0"/>
+          </a:p>
+        </p:txBody>
+      </p:sp>
+      <p:sp>
+        <p:nvSpPr>
+          <p:cNvPr id="26" name="diagram shape 38"/>
+          <p:cNvSpPr/>
+          <p:nvPr/>
+        </p:nvSpPr>
+        <p:spPr>
+          <a:xfrm>
+            <a:off x="548640" y="3749040"/>
+            <a:ext cx="2240280" cy="914400"/>
+          </a:xfrm>
+          <a:prstGeom prst="roundRect">
+            <a:avLst>
+              <a:gd name="adj" fmla="val 10000"/>
+            </a:avLst>
+          </a:prstGeom>
+          <a:solidFill>
+            <a:srgbClr val="DCFCE7"/>
+          </a:solidFill>
+          <a:ln w="19050">
+            <a:solidFill>
+              <a:srgbClr val="16A34A"/>
+            </a:solidFill>
+            <a:prstDash val="solid"/>
+          </a:ln>
+        </p:spPr>
+      </p:sp>
+      <p:sp>
+        <p:nvSpPr>
+          <p:cNvPr id="27" name="diagram label 38"/>
+          <p:cNvSpPr txBox="1"/>
+          <p:nvPr/>
+        </p:nvSpPr>
+        <p:spPr>
+          <a:xfrm>
+            <a:off x="640080" y="3749040"/>
+            <a:ext cx="2057400" cy="914400"/>
+          </a:xfrm>
+          <a:prstGeom prst="rect">
+            <a:avLst/>
+          </a:prstGeom>
+          <a:noFill/>
+          <a:ln/>
+        </p:spPr>
+        <p:txBody>
+          <a:bodyPr wrap="square" lIns="0" tIns="0" rIns="0" bIns="0" rtlCol="0" anchor="ctr"/>
+          <a:lstStyle/>
+          <a:p>
+            <a:pPr algn="ctr" indent="0" marL="0">
+              <a:buNone/>
+            </a:pPr>
+            <a:r>
+              <a:rPr lang="en-US" sz="1400" b="1" dirty="0">
+                <a:solidFill>
+                  <a:srgbClr val="14532D"/>
+                </a:solidFill>
+              </a:rPr>
+              <a:t>Each role sees</a:t>
+            </a:r>
+            <a:endParaRPr lang="en-US" sz="1400" dirty="0"/>
+          </a:p>
+          <a:p>
+            <a:pPr algn="ctr" indent="0" marL="0">
+              <a:buNone/>
+            </a:pPr>
+            <a:r>
+              <a:rPr lang="en-US" sz="1400" b="1" dirty="0">
+                <a:solidFill>
+                  <a:srgbClr val="14532D"/>
+                </a:solidFill>
+              </a:rPr>
+              <a:t>its own work</a:t>
+            </a:r>
+            <a:endParaRPr lang="en-US" sz="1400" dirty="0"/>
+          </a:p>
+        </p:txBody>
+      </p:sp>
+      <p:sp>
+        <p:nvSpPr>
+          <p:cNvPr id="28" name="diagram arrow 39"/>
+          <p:cNvSpPr/>
+          <p:nvPr/>
+        </p:nvSpPr>
+        <p:spPr>
+          <a:xfrm flipH="1">
+            <a:off x="8691677" y="4206240"/>
+            <a:ext cx="711098" cy="914"/>
+          </a:xfrm>
+          <a:prstGeom prst="line">
+            <a:avLst/>
+          </a:prstGeom>
+          <a:noFill/>
+          <a:ln w="22225">
+            <a:solidFill>
+              <a:srgbClr val="64748B"/>
+            </a:solidFill>
+            <a:prstDash val="solid"/>
+            <a:tailEnd type="triangle"/>
+          </a:ln>
+        </p:spPr>
+      </p:sp>
+      <p:sp>
+        <p:nvSpPr>
+          <p:cNvPr id="29" name="diagram note 40"/>
+          <p:cNvSpPr txBox="1"/>
+          <p:nvPr/>
+        </p:nvSpPr>
+        <p:spPr>
+          <a:xfrm>
+            <a:off x="8737397" y="3877056"/>
+            <a:ext cx="711098" cy="292608"/>
+          </a:xfrm>
+          <a:prstGeom prst="rect">
+            <a:avLst/>
+          </a:prstGeom>
+          <a:noFill/>
+          <a:ln/>
+        </p:spPr>
+        <p:txBody>
+          <a:bodyPr wrap="square" lIns="0" tIns="0" rIns="0" bIns="0" rtlCol="0" anchor="ctr"/>
+          <a:lstStyle/>
+          <a:p>
+            <a:pPr algn="ctr" indent="0" marL="0">
+              <a:buNone/>
+            </a:pPr>
+            <a:r>
+              <a:rPr lang="en-US" sz="1200" b="1" dirty="0">
+                <a:solidFill>
+                  <a:srgbClr val="15803D"/>
+                </a:solidFill>
+              </a:rPr>
+              <a:t>Yes</a:t>
+            </a:r>
+            <a:endParaRPr lang="en-US" sz="1200" dirty="0"/>
+          </a:p>
+        </p:txBody>
+      </p:sp>
+      <p:sp>
+        <p:nvSpPr>
+          <p:cNvPr id="30" name="diagram arrow 41"/>
+          <p:cNvSpPr/>
+          <p:nvPr/>
+        </p:nvSpPr>
+        <p:spPr>
+          <a:xfrm flipH="1">
+            <a:off x="5740298" y="4206240"/>
+            <a:ext cx="711098" cy="914"/>
+          </a:xfrm>
+          <a:prstGeom prst="line">
+            <a:avLst/>
+          </a:prstGeom>
+          <a:noFill/>
+          <a:ln w="22225">
+            <a:solidFill>
+              <a:srgbClr val="64748B"/>
+            </a:solidFill>
+            <a:prstDash val="solid"/>
+            <a:tailEnd type="triangle"/>
+          </a:ln>
+        </p:spPr>
+      </p:sp>
+      <p:sp>
+        <p:nvSpPr>
+          <p:cNvPr id="31" name="diagram arrow 42"/>
+          <p:cNvSpPr/>
+          <p:nvPr/>
+        </p:nvSpPr>
+        <p:spPr>
+          <a:xfrm flipH="1">
+            <a:off x="2788920" y="4206240"/>
+            <a:ext cx="711098" cy="914"/>
+          </a:xfrm>
+          <a:prstGeom prst="line">
+            <a:avLst/>
+          </a:prstGeom>
+          <a:noFill/>
+          <a:ln w="22225">
+            <a:solidFill>
+              <a:srgbClr val="64748B"/>
+            </a:solidFill>
+            <a:prstDash val="solid"/>
+            <a:tailEnd type="triangle"/>
+          </a:ln>
+        </p:spPr>
+      </p:sp>
+      <p:sp>
+        <p:nvSpPr>
+          <p:cNvPr id="32" name="diagram shape 43"/>
+          <p:cNvSpPr/>
+          <p:nvPr/>
+        </p:nvSpPr>
+        <p:spPr>
+          <a:xfrm>
+            <a:off x="9402775" y="5349240"/>
+            <a:ext cx="2240280" cy="777240"/>
+          </a:xfrm>
+          <a:prstGeom prst="roundRect">
+            <a:avLst>
+              <a:gd name="adj" fmla="val 11765"/>
+            </a:avLst>
+          </a:prstGeom>
+          <a:solidFill>
+            <a:srgbClr val="FEE2E2"/>
+          </a:solidFill>
+          <a:ln w="19050">
+            <a:solidFill>
+              <a:srgbClr val="DC2626"/>
+            </a:solidFill>
+            <a:prstDash val="solid"/>
+          </a:ln>
+        </p:spPr>
+      </p:sp>
+      <p:sp>
+        <p:nvSpPr>
+          <p:cNvPr id="33" name="diagram label 43"/>
+          <p:cNvSpPr txBox="1"/>
+          <p:nvPr/>
+        </p:nvSpPr>
+        <p:spPr>
+          <a:xfrm>
+            <a:off x="9494215" y="5349240"/>
+            <a:ext cx="2057400" cy="777240"/>
+          </a:xfrm>
+          <a:prstGeom prst="rect">
+            <a:avLst/>
+          </a:prstGeom>
+          <a:noFill/>
+          <a:ln/>
+        </p:spPr>
+        <p:txBody>
+          <a:bodyPr wrap="square" lIns="0" tIns="0" rIns="0" bIns="0" rtlCol="0" anchor="ctr"/>
+          <a:lstStyle/>
+          <a:p>
+            <a:pPr algn="ctr" indent="0" marL="0">
+              <a:buNone/>
+            </a:pPr>
+            <a:r>
+              <a:rPr lang="en-US" sz="1400" b="1" dirty="0">
+                <a:solidFill>
+                  <a:srgbClr val="7F1D1D"/>
+                </a:solidFill>
+              </a:rPr>
+              <a:t>400 + issues list</a:t>
+            </a:r>
+            <a:endParaRPr lang="en-US" sz="1400" dirty="0"/>
+          </a:p>
+          <a:p>
+            <a:pPr algn="ctr" indent="0" marL="0">
+              <a:buNone/>
+            </a:pPr>
+            <a:r>
+              <a:rPr lang="en-US" sz="1400" b="1" dirty="0">
+                <a:solidFill>
+                  <a:srgbClr val="7F1D1D"/>
+                </a:solidFill>
+              </a:rPr>
+              <a:t>nothing saved</a:t>
+            </a:r>
+            <a:endParaRPr lang="en-US" sz="1400" dirty="0"/>
+          </a:p>
+        </p:txBody>
+      </p:sp>
+      <p:sp>
+        <p:nvSpPr>
+          <p:cNvPr id="34" name="diagram arrow 44"/>
+          <p:cNvSpPr/>
+          <p:nvPr/>
+        </p:nvSpPr>
+        <p:spPr>
+          <a:xfrm>
+            <a:off x="10522915" y="4800600"/>
+            <a:ext cx="914" cy="548640"/>
+          </a:xfrm>
+          <a:prstGeom prst="line">
+            <a:avLst/>
+          </a:prstGeom>
+          <a:noFill/>
+          <a:ln w="22225">
+            <a:solidFill>
+              <a:srgbClr val="64748B"/>
+            </a:solidFill>
+            <a:prstDash val="solid"/>
+            <a:tailEnd type="triangle"/>
+          </a:ln>
+        </p:spPr>
+      </p:sp>
+      <p:sp>
+        <p:nvSpPr>
+          <p:cNvPr id="35" name="diagram note 45"/>
+          <p:cNvSpPr txBox="1"/>
+          <p:nvPr/>
+        </p:nvSpPr>
+        <p:spPr>
+          <a:xfrm>
+            <a:off x="10596067" y="4846320"/>
+            <a:ext cx="457200" cy="292608"/>
+          </a:xfrm>
+          <a:prstGeom prst="rect">
+            <a:avLst/>
+          </a:prstGeom>
+          <a:noFill/>
+          <a:ln/>
+        </p:spPr>
+        <p:txBody>
+          <a:bodyPr wrap="square" lIns="0" tIns="0" rIns="0" bIns="0" rtlCol="0" anchor="ctr"/>
+          <a:lstStyle/>
+          <a:p>
+            <a:pPr algn="l" indent="0" marL="0">
+              <a:buNone/>
+            </a:pPr>
+            <a:r>
+              <a:rPr lang="en-US" sz="1200" b="1" dirty="0">
+                <a:solidFill>
+                  <a:srgbClr val="B91C1C"/>
+                </a:solidFill>
+              </a:rPr>
+              <a:t>No</a:t>
+            </a:r>
+            <a:endParaRPr lang="en-US" sz="1200" dirty="0"/>
+          </a:p>
+        </p:txBody>
+      </p:sp>
+      <p:sp>
+        <p:nvSpPr>
+          <p:cNvPr id="36" name="diagram note 46"/>
+          <p:cNvSpPr txBox="1"/>
+          <p:nvPr/>
+        </p:nvSpPr>
+        <p:spPr>
+          <a:xfrm>
+            <a:off x="548640" y="5577840"/>
+            <a:ext cx="5943600" cy="292608"/>
+          </a:xfrm>
+          <a:prstGeom prst="rect">
+            <a:avLst/>
+          </a:prstGeom>
+          <a:noFill/>
+          <a:ln/>
+        </p:spPr>
+        <p:txBody>
+          <a:bodyPr wrap="square" lIns="0" tIns="0" rIns="0" bIns="0" rtlCol="0" anchor="ctr"/>
+          <a:lstStyle/>
+          <a:p>
+            <a:pPr algn="l" indent="0" marL="0">
+              <a:buNone/>
+            </a:pPr>
+            <a:r>
+              <a:rPr lang="en-US" sz="1200" dirty="0">
+                <a:solidFill>
+                  <a:srgbClr val="475569"/>
+                </a:solidFill>
+              </a:rPr>
+              <a:t>Checks: manager is a MANAGER · owner is an AGENT · hours &gt; 0 · task date ≤ project date</a:t>
+            </a:r>
+            <a:endParaRPr lang="en-US" sz="1200" dirty="0"/>
+          </a:p>
+        </p:txBody>
+      </p:sp>
+      <p:sp>
+        <p:nvSpPr>
+          <p:cNvPr id="25" name="Slide Number Placeholder 0"/>
+          <p:cNvSpPr>
+            <a:spLocks noGrp="1"/>
+          </p:cNvSpPr>
+          <p:nvPr>
+            <p:ph type="sldNum" sz="quarter" idx="4294967295"/>
+          </p:nvPr>
+        </p:nvSpPr>
+        <p:spPr>
+          <a:xfrm>
+            <a:off x="11094415" y="6400800"/>
+            <a:ext cx="548640" cy="274320"/>
+          </a:xfrm>
+          <a:prstGeom prst="rect">
+            <a:avLst/>
+          </a:prstGeom>
+          <a:extLst>
+            <a:ext uri="{C572A759-6A51-4108-AA02-DFA0A04FC94B}">
+              <ma14:wrappingTextBoxFlag xmlns:ma14="http://schemas.microsoft.com/office/mac/drawingml/2011/main" val="0"/>
+            </a:ext>
+          </a:extLst>
+        </p:spPr>
+        <p:txBody>
+          <a:bodyPr/>
+          <a:lstStyle>
+            <a:lvl1pPr>
+              <a:defRPr sz="1000">
+                <a:solidFill>
+                  <a:srgbClr val="64748B"/>
+                </a:solidFill>
+              </a:defRPr>
+            </a:lvl1pPr>
+          </a:lstStyle>
+          <a:p>
+            <a:pPr algn="r"/>
+            <a:fld id="{F7021451-1387-4CA6-816F-3879F97B5CBC}" type="slidenum">
+              <a:rPr b="0" lang="en-US"/>
+              <a:t>12</a:t>
+            </a:fld>
+            <a:endParaRPr lang="en-US"/>
+          </a:p>
+        </p:txBody>
+      </p:sp>
+    </p:spTree>
+  </p:cSld>
+  <p:clrMapOvr>
+    <a:masterClrMapping/>
+  </p:clrMapOvr>
+</p:sld>
+</file>
+
+<file path=ppt/slides/slide13.xml><?xml version="1.0" encoding="utf-8"?>
+<p:sld xmlns:a="http://schemas.openxmlformats.org/drawingml/2006/main" xmlns:r="http://schemas.openxmlformats.org/officeDocument/2006/relationships" xmlns:p="http://schemas.openxmlformats.org/presentationml/2006/main">
+  <p:cSld name="Slide 13">
+    <p:spTree>
+      <p:nvGrpSpPr>
+        <p:cNvPr id="1" name=""/>
+        <p:cNvGrpSpPr/>
+        <p:nvPr/>
+      </p:nvGrpSpPr>
+      <p:grpSpPr>
+        <a:xfrm>
+          <a:off x="0" y="0"/>
+          <a:ext cx="0" cy="0"/>
+          <a:chOff x="0" y="0"/>
+          <a:chExt cx="0" cy="0"/>
+        </a:xfrm>
+      </p:grpSpPr>
+      <p:sp>
+        <p:nvSpPr>
+          <p:cNvPr id="2" name="Text 0"/>
+          <p:cNvSpPr/>
+          <p:nvPr>
+            <p:ph idx="100" type="title" hasCustomPrompt="1"/>
+          </p:nvPr>
+        </p:nvSpPr>
+        <p:spPr>
+          <a:xfrm>
+            <a:off x="548640" y="347472"/>
+            <a:ext cx="11094415" cy="731520"/>
+          </a:xfrm>
+          <a:prstGeom prst="rect">
+            <a:avLst/>
+          </a:prstGeom>
+          <a:noFill/>
+          <a:ln/>
+        </p:spPr>
+        <p:txBody>
+          <a:bodyPr wrap="square" lIns="0" tIns="0" rIns="0" bIns="0" rtlCol="0" anchor="ctr"/>
+          <a:lstStyle/>
+          <a:p>
+            <a:pPr algn="l" indent="0" marL="0">
+              <a:buNone/>
+            </a:pPr>
+            <a:r>
+              <a:rPr lang="en-US" sz="3400" b="1" dirty="0">
+                <a:solidFill>
+                  <a:schemeClr val="tx1"/>
+                </a:solidFill>
+              </a:rPr>
+              <a:t>Flowchart: every API request</a:t>
+            </a:r>
+            <a:endParaRPr lang="en-US" sz="3400" dirty="0"/>
+          </a:p>
+        </p:txBody>
+      </p:sp>
+      <p:sp>
+        <p:nvSpPr>
+          <p:cNvPr id="3" name="diagram shape 47"/>
+          <p:cNvSpPr/>
+          <p:nvPr/>
+        </p:nvSpPr>
+        <p:spPr>
+          <a:xfrm>
+            <a:off x="548640" y="2377440"/>
+            <a:ext cx="1874520" cy="914400"/>
+          </a:xfrm>
+          <a:prstGeom prst="roundRect">
+            <a:avLst>
+              <a:gd name="adj" fmla="val 10000"/>
+            </a:avLst>
+          </a:prstGeom>
+          <a:solidFill>
+            <a:srgbClr val="FFFFFF"/>
+          </a:solidFill>
+          <a:ln w="19050">
+            <a:solidFill>
+              <a:srgbClr val="CBD5E1"/>
+            </a:solidFill>
+            <a:prstDash val="solid"/>
+          </a:ln>
+        </p:spPr>
+      </p:sp>
+      <p:sp>
+        <p:nvSpPr>
+          <p:cNvPr id="4" name="diagram label 47"/>
+          <p:cNvSpPr txBox="1"/>
+          <p:nvPr/>
+        </p:nvSpPr>
+        <p:spPr>
+          <a:xfrm>
+            <a:off x="640080" y="2377440"/>
+            <a:ext cx="1691640" cy="914400"/>
+          </a:xfrm>
+          <a:prstGeom prst="rect">
+            <a:avLst/>
+          </a:prstGeom>
+          <a:noFill/>
+          <a:ln/>
+        </p:spPr>
+        <p:txBody>
+          <a:bodyPr wrap="square" lIns="0" tIns="0" rIns="0" bIns="0" rtlCol="0" anchor="ctr"/>
+          <a:lstStyle/>
+          <a:p>
+            <a:pPr algn="ctr" indent="0" marL="0">
+              <a:buNone/>
+            </a:pPr>
+            <a:r>
+              <a:rPr lang="en-US" sz="1400" b="1" dirty="0">
+                <a:solidFill>
+                  <a:srgbClr val="0F172A"/>
+                </a:solidFill>
+              </a:rPr>
+              <a:t>Request</a:t>
+            </a:r>
+            <a:endParaRPr lang="en-US" sz="1400" dirty="0"/>
+          </a:p>
+          <a:p>
+            <a:pPr algn="ctr" indent="0" marL="0">
+              <a:buNone/>
+            </a:pPr>
+            <a:r>
+              <a:rPr lang="en-US" sz="1400" b="1" dirty="0">
+                <a:solidFill>
+                  <a:srgbClr val="0F172A"/>
+                </a:solidFill>
+              </a:rPr>
+              <a:t>+ cookie</a:t>
+            </a:r>
+            <a:endParaRPr lang="en-US" sz="1400" dirty="0"/>
+          </a:p>
+        </p:txBody>
+      </p:sp>
+      <p:sp>
+        <p:nvSpPr>
+          <p:cNvPr id="5" name="diagram shape 48"/>
+          <p:cNvSpPr/>
+          <p:nvPr/>
+        </p:nvSpPr>
+        <p:spPr>
+          <a:xfrm>
+            <a:off x="2853614" y="2194560"/>
+            <a:ext cx="1874520" cy="1280160"/>
+          </a:xfrm>
+          <a:prstGeom prst="diamond">
+            <a:avLst/>
+          </a:prstGeom>
+          <a:solidFill>
+            <a:srgbClr val="EEF2FF"/>
+          </a:solidFill>
+          <a:ln w="19050">
+            <a:solidFill>
+              <a:srgbClr val="4F46E5"/>
+            </a:solidFill>
+            <a:prstDash val="solid"/>
+          </a:ln>
+        </p:spPr>
+      </p:sp>
+      <p:sp>
+        <p:nvSpPr>
+          <p:cNvPr id="6" name="diagram label 48"/>
+          <p:cNvSpPr txBox="1"/>
+          <p:nvPr/>
+        </p:nvSpPr>
+        <p:spPr>
+          <a:xfrm>
+            <a:off x="3228518" y="2194560"/>
+            <a:ext cx="1124712" cy="1280160"/>
+          </a:xfrm>
+          <a:prstGeom prst="rect">
+            <a:avLst/>
+          </a:prstGeom>
+          <a:noFill/>
+          <a:ln/>
+        </p:spPr>
+        <p:txBody>
+          <a:bodyPr wrap="square" lIns="0" tIns="0" rIns="0" bIns="0" rtlCol="0" anchor="ctr"/>
+          <a:lstStyle/>
+          <a:p>
+            <a:pPr algn="ctr" indent="0" marL="0">
+              <a:buNone/>
+            </a:pPr>
+            <a:r>
+              <a:rPr lang="en-US" sz="1400" b="1" dirty="0">
+                <a:solidFill>
+                  <a:srgbClr val="1E1B4B"/>
+                </a:solidFill>
+              </a:rPr>
+              <a:t>Session valid?</a:t>
+            </a:r>
+            <a:endParaRPr lang="en-US" sz="1400" dirty="0"/>
+          </a:p>
+        </p:txBody>
+      </p:sp>
+      <p:sp>
+        <p:nvSpPr>
+          <p:cNvPr id="7" name="diagram shape 49"/>
+          <p:cNvSpPr/>
+          <p:nvPr/>
+        </p:nvSpPr>
+        <p:spPr>
+          <a:xfrm>
+            <a:off x="5158588" y="2377440"/>
+            <a:ext cx="1874520" cy="914400"/>
+          </a:xfrm>
+          <a:prstGeom prst="roundRect">
+            <a:avLst>
+              <a:gd name="adj" fmla="val 10000"/>
+            </a:avLst>
+          </a:prstGeom>
+          <a:solidFill>
+            <a:srgbClr val="EEF2FF"/>
+          </a:solidFill>
+          <a:ln w="19050">
+            <a:solidFill>
+              <a:srgbClr val="4F46E5"/>
+            </a:solidFill>
+            <a:prstDash val="solid"/>
+          </a:ln>
+        </p:spPr>
+      </p:sp>
+      <p:sp>
+        <p:nvSpPr>
+          <p:cNvPr id="8" name="diagram label 49"/>
+          <p:cNvSpPr txBox="1"/>
+          <p:nvPr/>
+        </p:nvSpPr>
+        <p:spPr>
+          <a:xfrm>
+            <a:off x="5250028" y="2377440"/>
+            <a:ext cx="1691640" cy="914400"/>
+          </a:xfrm>
+          <a:prstGeom prst="rect">
+            <a:avLst/>
+          </a:prstGeom>
+          <a:noFill/>
+          <a:ln/>
+        </p:spPr>
+        <p:txBody>
+          <a:bodyPr wrap="square" lIns="0" tIns="0" rIns="0" bIns="0" rtlCol="0" anchor="ctr"/>
+          <a:lstStyle/>
+          <a:p>
+            <a:pPr algn="ctr" indent="0" marL="0">
+              <a:buNone/>
+            </a:pPr>
+            <a:r>
+              <a:rPr lang="en-US" sz="1400" b="1" dirty="0">
+                <a:solidFill>
+                  <a:srgbClr val="1E1B4B"/>
+                </a:solidFill>
+              </a:rPr>
+              <a:t>Role filter in</a:t>
+            </a:r>
+            <a:endParaRPr lang="en-US" sz="1400" dirty="0"/>
+          </a:p>
+          <a:p>
+            <a:pPr algn="ctr" indent="0" marL="0">
+              <a:buNone/>
+            </a:pPr>
+            <a:r>
+              <a:rPr lang="en-US" sz="1400" b="1" dirty="0">
+                <a:solidFill>
+                  <a:srgbClr val="1E1B4B"/>
+                </a:solidFill>
+              </a:rPr>
+              <a:t>DB query</a:t>
+            </a:r>
+            <a:endParaRPr lang="en-US" sz="1400" dirty="0"/>
+          </a:p>
+        </p:txBody>
+      </p:sp>
+      <p:sp>
+        <p:nvSpPr>
+          <p:cNvPr id="9" name="diagram shape 50"/>
+          <p:cNvSpPr/>
+          <p:nvPr/>
+        </p:nvSpPr>
+        <p:spPr>
+          <a:xfrm>
+            <a:off x="7463561" y="2194560"/>
+            <a:ext cx="1874520" cy="1280160"/>
+          </a:xfrm>
+          <a:prstGeom prst="diamond">
+            <a:avLst/>
+          </a:prstGeom>
+          <a:solidFill>
+            <a:srgbClr val="EEF2FF"/>
+          </a:solidFill>
+          <a:ln w="19050">
+            <a:solidFill>
+              <a:srgbClr val="4F46E5"/>
+            </a:solidFill>
+            <a:prstDash val="solid"/>
+          </a:ln>
+        </p:spPr>
+      </p:sp>
+      <p:sp>
+        <p:nvSpPr>
+          <p:cNvPr id="10" name="diagram label 50"/>
+          <p:cNvSpPr txBox="1"/>
+          <p:nvPr/>
+        </p:nvSpPr>
+        <p:spPr>
+          <a:xfrm>
+            <a:off x="7838465" y="2194560"/>
+            <a:ext cx="1124712" cy="1280160"/>
+          </a:xfrm>
+          <a:prstGeom prst="rect">
+            <a:avLst/>
+          </a:prstGeom>
+          <a:noFill/>
+          <a:ln/>
+        </p:spPr>
+        <p:txBody>
+          <a:bodyPr wrap="square" lIns="0" tIns="0" rIns="0" bIns="0" rtlCol="0" anchor="ctr"/>
+          <a:lstStyle/>
+          <a:p>
+            <a:pPr algn="ctr" indent="0" marL="0">
+              <a:buNone/>
+            </a:pPr>
+            <a:r>
+              <a:rPr lang="en-US" sz="1400" b="1" dirty="0">
+                <a:solidFill>
+                  <a:srgbClr val="1E1B4B"/>
+                </a:solidFill>
+              </a:rPr>
+              <a:t>In user's scope?</a:t>
+            </a:r>
+            <a:endParaRPr lang="en-US" sz="1400" dirty="0"/>
+          </a:p>
+        </p:txBody>
+      </p:sp>
+      <p:sp>
+        <p:nvSpPr>
+          <p:cNvPr id="11" name="diagram shape 51"/>
+          <p:cNvSpPr/>
+          <p:nvPr/>
+        </p:nvSpPr>
+        <p:spPr>
+          <a:xfrm>
+            <a:off x="9768535" y="2377440"/>
+            <a:ext cx="1874520" cy="914400"/>
+          </a:xfrm>
+          <a:prstGeom prst="roundRect">
+            <a:avLst>
+              <a:gd name="adj" fmla="val 10000"/>
+            </a:avLst>
+          </a:prstGeom>
+          <a:solidFill>
+            <a:srgbClr val="DCFCE7"/>
+          </a:solidFill>
+          <a:ln w="19050">
+            <a:solidFill>
+              <a:srgbClr val="16A34A"/>
+            </a:solidFill>
+            <a:prstDash val="solid"/>
+          </a:ln>
+        </p:spPr>
+      </p:sp>
+      <p:sp>
+        <p:nvSpPr>
+          <p:cNvPr id="12" name="diagram label 51"/>
+          <p:cNvSpPr txBox="1"/>
+          <p:nvPr/>
+        </p:nvSpPr>
+        <p:spPr>
+          <a:xfrm>
+            <a:off x="9859975" y="2377440"/>
+            <a:ext cx="1691640" cy="914400"/>
+          </a:xfrm>
+          <a:prstGeom prst="rect">
+            <a:avLst/>
+          </a:prstGeom>
+          <a:noFill/>
+          <a:ln/>
+        </p:spPr>
+        <p:txBody>
+          <a:bodyPr wrap="square" lIns="0" tIns="0" rIns="0" bIns="0" rtlCol="0" anchor="ctr"/>
+          <a:lstStyle/>
+          <a:p>
+            <a:pPr algn="ctr" indent="0" marL="0">
+              <a:buNone/>
+            </a:pPr>
+            <a:r>
+              <a:rPr lang="en-US" sz="1400" b="1" dirty="0">
+                <a:solidFill>
+                  <a:srgbClr val="14532D"/>
+                </a:solidFill>
+              </a:rPr>
+              <a:t>200 JSON</a:t>
+            </a:r>
+            <a:endParaRPr lang="en-US" sz="1400" dirty="0"/>
+          </a:p>
+          <a:p>
+            <a:pPr algn="ctr" indent="0" marL="0">
+              <a:buNone/>
+            </a:pPr>
+            <a:r>
+              <a:rPr lang="en-US" sz="1400" b="1" dirty="0">
+                <a:solidFill>
+                  <a:srgbClr val="14532D"/>
+                </a:solidFill>
+              </a:rPr>
+              <a:t>only allowed data</a:t>
+            </a:r>
+            <a:endParaRPr lang="en-US" sz="1400" dirty="0"/>
+          </a:p>
+        </p:txBody>
+      </p:sp>
+      <p:sp>
+        <p:nvSpPr>
+          <p:cNvPr id="13" name="diagram arrow 52"/>
+          <p:cNvSpPr/>
+          <p:nvPr/>
+        </p:nvSpPr>
+        <p:spPr>
+          <a:xfrm>
+            <a:off x="2423160" y="2834640"/>
+            <a:ext cx="430454" cy="914"/>
+          </a:xfrm>
+          <a:prstGeom prst="line">
+            <a:avLst/>
+          </a:prstGeom>
+          <a:noFill/>
+          <a:ln w="22225">
+            <a:solidFill>
+              <a:srgbClr val="64748B"/>
+            </a:solidFill>
+            <a:prstDash val="solid"/>
+            <a:tailEnd type="triangle"/>
+          </a:ln>
+        </p:spPr>
+      </p:sp>
+      <p:sp>
+        <p:nvSpPr>
+          <p:cNvPr id="14" name="diagram arrow 53"/>
+          <p:cNvSpPr/>
+          <p:nvPr/>
+        </p:nvSpPr>
+        <p:spPr>
+          <a:xfrm>
+            <a:off x="4728134" y="2834640"/>
+            <a:ext cx="430454" cy="914"/>
+          </a:xfrm>
+          <a:prstGeom prst="line">
+            <a:avLst/>
+          </a:prstGeom>
+          <a:noFill/>
+          <a:ln w="22225">
+            <a:solidFill>
+              <a:srgbClr val="64748B"/>
+            </a:solidFill>
+            <a:prstDash val="solid"/>
+            <a:tailEnd type="triangle"/>
+          </a:ln>
+        </p:spPr>
+      </p:sp>
+      <p:sp>
+        <p:nvSpPr>
+          <p:cNvPr id="15" name="diagram note 54"/>
+          <p:cNvSpPr txBox="1"/>
+          <p:nvPr/>
+        </p:nvSpPr>
+        <p:spPr>
+          <a:xfrm>
+            <a:off x="4728134" y="2505456"/>
+            <a:ext cx="430454" cy="292608"/>
+          </a:xfrm>
+          <a:prstGeom prst="rect">
+            <a:avLst/>
+          </a:prstGeom>
+          <a:noFill/>
+          <a:ln/>
+        </p:spPr>
+        <p:txBody>
+          <a:bodyPr wrap="square" lIns="0" tIns="0" rIns="0" bIns="0" rtlCol="0" anchor="ctr"/>
+          <a:lstStyle/>
+          <a:p>
+            <a:pPr algn="ctr" indent="0" marL="0">
+              <a:buNone/>
+            </a:pPr>
+            <a:r>
+              <a:rPr lang="en-US" sz="1200" b="1" dirty="0">
+                <a:solidFill>
+                  <a:srgbClr val="15803D"/>
+                </a:solidFill>
+              </a:rPr>
+              <a:t>Yes</a:t>
+            </a:r>
+            <a:endParaRPr lang="en-US" sz="1200" dirty="0"/>
+          </a:p>
+        </p:txBody>
+      </p:sp>
+      <p:sp>
+        <p:nvSpPr>
+          <p:cNvPr id="16" name="diagram arrow 55"/>
+          <p:cNvSpPr/>
+          <p:nvPr/>
+        </p:nvSpPr>
+        <p:spPr>
+          <a:xfrm>
+            <a:off x="7033108" y="2834640"/>
+            <a:ext cx="430454" cy="914"/>
+          </a:xfrm>
+          <a:prstGeom prst="line">
+            <a:avLst/>
+          </a:prstGeom>
+          <a:noFill/>
+          <a:ln w="22225">
+            <a:solidFill>
+              <a:srgbClr val="64748B"/>
+            </a:solidFill>
+            <a:prstDash val="solid"/>
+            <a:tailEnd type="triangle"/>
+          </a:ln>
+        </p:spPr>
+      </p:sp>
+      <p:sp>
+        <p:nvSpPr>
+          <p:cNvPr id="17" name="diagram arrow 56"/>
+          <p:cNvSpPr/>
+          <p:nvPr/>
+        </p:nvSpPr>
+        <p:spPr>
+          <a:xfrm>
+            <a:off x="9338081" y="2834640"/>
+            <a:ext cx="430454" cy="914"/>
+          </a:xfrm>
+          <a:prstGeom prst="line">
+            <a:avLst/>
+          </a:prstGeom>
+          <a:noFill/>
+          <a:ln w="22225">
+            <a:solidFill>
+              <a:srgbClr val="64748B"/>
+            </a:solidFill>
+            <a:prstDash val="solid"/>
+            <a:tailEnd type="triangle"/>
+          </a:ln>
+        </p:spPr>
+      </p:sp>
+      <p:sp>
+        <p:nvSpPr>
+          <p:cNvPr id="18" name="diagram note 57"/>
+          <p:cNvSpPr txBox="1"/>
+          <p:nvPr/>
+        </p:nvSpPr>
+        <p:spPr>
+          <a:xfrm>
+            <a:off x="9338081" y="2505456"/>
+            <a:ext cx="430454" cy="292608"/>
+          </a:xfrm>
+          <a:prstGeom prst="rect">
+            <a:avLst/>
+          </a:prstGeom>
+          <a:noFill/>
+          <a:ln/>
+        </p:spPr>
+        <p:txBody>
+          <a:bodyPr wrap="square" lIns="0" tIns="0" rIns="0" bIns="0" rtlCol="0" anchor="ctr"/>
+          <a:lstStyle/>
+          <a:p>
+            <a:pPr algn="ctr" indent="0" marL="0">
+              <a:buNone/>
+            </a:pPr>
+            <a:r>
+              <a:rPr lang="en-US" sz="1200" b="1" dirty="0">
+                <a:solidFill>
+                  <a:srgbClr val="15803D"/>
+                </a:solidFill>
+              </a:rPr>
+              <a:t>Yes</a:t>
+            </a:r>
+            <a:endParaRPr lang="en-US" sz="1200" dirty="0"/>
+          </a:p>
+        </p:txBody>
+      </p:sp>
+      <p:sp>
+        <p:nvSpPr>
+          <p:cNvPr id="19" name="diagram shape 58"/>
+          <p:cNvSpPr/>
+          <p:nvPr/>
+        </p:nvSpPr>
+        <p:spPr>
+          <a:xfrm>
+            <a:off x="2853614" y="4297680"/>
+            <a:ext cx="1874520" cy="731520"/>
+          </a:xfrm>
+          <a:prstGeom prst="roundRect">
+            <a:avLst>
+              <a:gd name="adj" fmla="val 12500"/>
+            </a:avLst>
+          </a:prstGeom>
+          <a:solidFill>
+            <a:srgbClr val="FEE2E2"/>
+          </a:solidFill>
+          <a:ln w="19050">
+            <a:solidFill>
+              <a:srgbClr val="DC2626"/>
+            </a:solidFill>
+            <a:prstDash val="solid"/>
+          </a:ln>
+        </p:spPr>
+      </p:sp>
+      <p:sp>
+        <p:nvSpPr>
+          <p:cNvPr id="20" name="diagram label 58"/>
+          <p:cNvSpPr txBox="1"/>
+          <p:nvPr/>
+        </p:nvSpPr>
+        <p:spPr>
+          <a:xfrm>
+            <a:off x="2945054" y="4297680"/>
+            <a:ext cx="1691640" cy="731520"/>
+          </a:xfrm>
+          <a:prstGeom prst="rect">
+            <a:avLst/>
+          </a:prstGeom>
+          <a:noFill/>
+          <a:ln/>
+        </p:spPr>
+        <p:txBody>
+          <a:bodyPr wrap="square" lIns="0" tIns="0" rIns="0" bIns="0" rtlCol="0" anchor="ctr"/>
+          <a:lstStyle/>
+          <a:p>
+            <a:pPr algn="ctr" indent="0" marL="0">
+              <a:buNone/>
+            </a:pPr>
+            <a:r>
+              <a:rPr lang="en-US" sz="1400" b="1" dirty="0">
+                <a:solidFill>
+                  <a:srgbClr val="7F1D1D"/>
+                </a:solidFill>
+              </a:rPr>
+              <a:t>401</a:t>
+            </a:r>
+            <a:endParaRPr lang="en-US" sz="1400" dirty="0"/>
+          </a:p>
+          <a:p>
+            <a:pPr algn="ctr" indent="0" marL="0">
+              <a:buNone/>
+            </a:pPr>
+            <a:r>
+              <a:rPr lang="en-US" sz="1400" b="1" dirty="0">
+                <a:solidFill>
+                  <a:srgbClr val="7F1D1D"/>
+                </a:solidFill>
+              </a:rPr>
+              <a:t>Please log in</a:t>
+            </a:r>
+            <a:endParaRPr lang="en-US" sz="1400" dirty="0"/>
+          </a:p>
+        </p:txBody>
+      </p:sp>
+      <p:sp>
+        <p:nvSpPr>
+          <p:cNvPr id="21" name="diagram arrow 59"/>
+          <p:cNvSpPr/>
+          <p:nvPr/>
+        </p:nvSpPr>
+        <p:spPr>
+          <a:xfrm>
+            <a:off x="3790874" y="3474720"/>
+            <a:ext cx="914" cy="822960"/>
+          </a:xfrm>
+          <a:prstGeom prst="line">
+            <a:avLst/>
+          </a:prstGeom>
+          <a:noFill/>
+          <a:ln w="22225">
+            <a:solidFill>
+              <a:srgbClr val="64748B"/>
+            </a:solidFill>
+            <a:prstDash val="solid"/>
+            <a:tailEnd type="triangle"/>
+          </a:ln>
+        </p:spPr>
+      </p:sp>
+      <p:sp>
+        <p:nvSpPr>
+          <p:cNvPr id="22" name="diagram note 60"/>
+          <p:cNvSpPr txBox="1"/>
+          <p:nvPr/>
+        </p:nvSpPr>
+        <p:spPr>
+          <a:xfrm>
+            <a:off x="3864026" y="3547872"/>
+            <a:ext cx="457200" cy="292608"/>
+          </a:xfrm>
+          <a:prstGeom prst="rect">
+            <a:avLst/>
+          </a:prstGeom>
+          <a:noFill/>
+          <a:ln/>
+        </p:spPr>
+        <p:txBody>
+          <a:bodyPr wrap="square" lIns="0" tIns="0" rIns="0" bIns="0" rtlCol="0" anchor="ctr"/>
+          <a:lstStyle/>
+          <a:p>
+            <a:pPr algn="l" indent="0" marL="0">
+              <a:buNone/>
+            </a:pPr>
+            <a:r>
+              <a:rPr lang="en-US" sz="1200" b="1" dirty="0">
+                <a:solidFill>
+                  <a:srgbClr val="B91C1C"/>
+                </a:solidFill>
+              </a:rPr>
+              <a:t>No</a:t>
+            </a:r>
+            <a:endParaRPr lang="en-US" sz="1200" dirty="0"/>
+          </a:p>
+        </p:txBody>
+      </p:sp>
+      <p:sp>
+        <p:nvSpPr>
+          <p:cNvPr id="23" name="diagram shape 61"/>
+          <p:cNvSpPr/>
+          <p:nvPr/>
+        </p:nvSpPr>
+        <p:spPr>
+          <a:xfrm>
+            <a:off x="7463561" y="4297680"/>
+            <a:ext cx="1874520" cy="731520"/>
+          </a:xfrm>
+          <a:prstGeom prst="roundRect">
+            <a:avLst>
+              <a:gd name="adj" fmla="val 12500"/>
+            </a:avLst>
+          </a:prstGeom>
+          <a:solidFill>
+            <a:srgbClr val="FEE2E2"/>
+          </a:solidFill>
+          <a:ln w="19050">
+            <a:solidFill>
+              <a:srgbClr val="DC2626"/>
+            </a:solidFill>
+            <a:prstDash val="solid"/>
+          </a:ln>
+        </p:spPr>
+      </p:sp>
+      <p:sp>
+        <p:nvSpPr>
+          <p:cNvPr id="24" name="diagram label 61"/>
+          <p:cNvSpPr txBox="1"/>
+          <p:nvPr/>
+        </p:nvSpPr>
+        <p:spPr>
+          <a:xfrm>
+            <a:off x="7555001" y="4297680"/>
+            <a:ext cx="1691640" cy="731520"/>
+          </a:xfrm>
+          <a:prstGeom prst="rect">
+            <a:avLst/>
+          </a:prstGeom>
+          <a:noFill/>
+          <a:ln/>
+        </p:spPr>
+        <p:txBody>
+          <a:bodyPr wrap="square" lIns="0" tIns="0" rIns="0" bIns="0" rtlCol="0" anchor="ctr"/>
+          <a:lstStyle/>
+          <a:p>
+            <a:pPr algn="ctr" indent="0" marL="0">
+              <a:buNone/>
+            </a:pPr>
+            <a:r>
+              <a:rPr lang="en-US" sz="1400" b="1" dirty="0">
+                <a:solidFill>
+                  <a:srgbClr val="7F1D1D"/>
+                </a:solidFill>
+              </a:rPr>
+              <a:t>403</a:t>
+            </a:r>
+            <a:endParaRPr lang="en-US" sz="1400" dirty="0"/>
+          </a:p>
+          <a:p>
+            <a:pPr algn="ctr" indent="0" marL="0">
+              <a:buNone/>
+            </a:pPr>
+            <a:r>
+              <a:rPr lang="en-US" sz="1400" b="1" dirty="0">
+                <a:solidFill>
+                  <a:srgbClr val="7F1D1D"/>
+                </a:solidFill>
+              </a:rPr>
+              <a:t>Access denied</a:t>
+            </a:r>
+            <a:endParaRPr lang="en-US" sz="1400" dirty="0"/>
+          </a:p>
+        </p:txBody>
+      </p:sp>
+      <p:sp>
+        <p:nvSpPr>
+          <p:cNvPr id="25" name="diagram arrow 62"/>
+          <p:cNvSpPr/>
+          <p:nvPr/>
+        </p:nvSpPr>
+        <p:spPr>
+          <a:xfrm>
+            <a:off x="8400821" y="3474720"/>
+            <a:ext cx="914" cy="822960"/>
+          </a:xfrm>
+          <a:prstGeom prst="line">
+            <a:avLst/>
+          </a:prstGeom>
+          <a:noFill/>
+          <a:ln w="22225">
+            <a:solidFill>
+              <a:srgbClr val="64748B"/>
+            </a:solidFill>
+            <a:prstDash val="solid"/>
+            <a:tailEnd type="triangle"/>
+          </a:ln>
+        </p:spPr>
+      </p:sp>
+      <p:sp>
+        <p:nvSpPr>
+          <p:cNvPr id="26" name="diagram note 63"/>
+          <p:cNvSpPr txBox="1"/>
+          <p:nvPr/>
+        </p:nvSpPr>
+        <p:spPr>
+          <a:xfrm>
+            <a:off x="8473973" y="3547872"/>
+            <a:ext cx="457200" cy="292608"/>
+          </a:xfrm>
+          <a:prstGeom prst="rect">
+            <a:avLst/>
+          </a:prstGeom>
+          <a:noFill/>
+          <a:ln/>
+        </p:spPr>
+        <p:txBody>
+          <a:bodyPr wrap="square" lIns="0" tIns="0" rIns="0" bIns="0" rtlCol="0" anchor="ctr"/>
+          <a:lstStyle/>
+          <a:p>
+            <a:pPr algn="l" indent="0" marL="0">
+              <a:buNone/>
+            </a:pPr>
+            <a:r>
+              <a:rPr lang="en-US" sz="1200" b="1" dirty="0">
+                <a:solidFill>
+                  <a:srgbClr val="B91C1C"/>
+                </a:solidFill>
+              </a:rPr>
+              <a:t>No</a:t>
+            </a:r>
+            <a:endParaRPr lang="en-US" sz="1200" dirty="0"/>
+          </a:p>
+        </p:txBody>
+      </p:sp>
+      <p:sp>
+        <p:nvSpPr>
+          <p:cNvPr id="27" name="diagram arrow 64"/>
+          <p:cNvSpPr/>
+          <p:nvPr/>
+        </p:nvSpPr>
+        <p:spPr>
+          <a:xfrm>
+            <a:off x="6095848" y="3291840"/>
+            <a:ext cx="914" cy="822960"/>
+          </a:xfrm>
+          <a:prstGeom prst="line">
+            <a:avLst/>
+          </a:prstGeom>
+          <a:noFill/>
+          <a:ln w="22225">
+            <a:solidFill>
+              <a:srgbClr val="64748B"/>
+            </a:solidFill>
+            <a:prstDash val="dash"/>
+          </a:ln>
+        </p:spPr>
+      </p:sp>
+      <p:sp>
+        <p:nvSpPr>
+          <p:cNvPr id="28" name="filter pill 1"/>
+          <p:cNvSpPr/>
+          <p:nvPr/>
+        </p:nvSpPr>
+        <p:spPr>
+          <a:xfrm>
+            <a:off x="4838548" y="4114800"/>
+            <a:ext cx="2514600" cy="402336"/>
+          </a:xfrm>
+          <a:prstGeom prst="roundRect">
+            <a:avLst>
+              <a:gd name="adj" fmla="val 50000"/>
+            </a:avLst>
+          </a:prstGeom>
+          <a:solidFill>
+            <a:srgbClr val="4F46E5"/>
+          </a:solidFill>
+          <a:ln w="12700">
+            <a:solidFill>
+              <a:srgbClr val="4F46E5"/>
+            </a:solidFill>
+            <a:prstDash val="solid"/>
+          </a:ln>
+        </p:spPr>
+      </p:sp>
+      <p:sp>
+        <p:nvSpPr>
+          <p:cNvPr id="29" name="filter pill 1 text"/>
+          <p:cNvSpPr txBox="1"/>
+          <p:nvPr/>
+        </p:nvSpPr>
+        <p:spPr>
+          <a:xfrm>
+            <a:off x="4838548" y="4114800"/>
+            <a:ext cx="2514600" cy="402336"/>
+          </a:xfrm>
+          <a:prstGeom prst="rect">
+            <a:avLst/>
+          </a:prstGeom>
+          <a:noFill/>
+          <a:ln/>
+        </p:spPr>
+        <p:txBody>
+          <a:bodyPr wrap="square" lIns="0" tIns="0" rIns="0" bIns="0" rtlCol="0" anchor="ctr"/>
+          <a:lstStyle/>
+          <a:p>
+            <a:pPr algn="ctr" indent="0" marL="0">
+              <a:buNone/>
+            </a:pPr>
+            <a:r>
+              <a:rPr lang="en-US" sz="1300" b="1" dirty="0">
+                <a:solidFill>
+                  <a:srgbClr val="FFFFFF"/>
+                </a:solidFill>
+              </a:rPr>
+              <a:t>Admin: all</a:t>
+            </a:r>
+            <a:endParaRPr lang="en-US" sz="1300" dirty="0"/>
+          </a:p>
+        </p:txBody>
+      </p:sp>
+      <p:sp>
+        <p:nvSpPr>
+          <p:cNvPr id="30" name="filter pill 2"/>
+          <p:cNvSpPr/>
+          <p:nvPr/>
+        </p:nvSpPr>
+        <p:spPr>
+          <a:xfrm>
+            <a:off x="4838548" y="4617720"/>
+            <a:ext cx="2514600" cy="402336"/>
+          </a:xfrm>
+          <a:prstGeom prst="roundRect">
+            <a:avLst>
+              <a:gd name="adj" fmla="val 50000"/>
+            </a:avLst>
+          </a:prstGeom>
+          <a:solidFill>
+            <a:srgbClr val="0D9488"/>
+          </a:solidFill>
+          <a:ln w="12700">
+            <a:solidFill>
+              <a:srgbClr val="0D9488"/>
+            </a:solidFill>
+            <a:prstDash val="solid"/>
+          </a:ln>
+        </p:spPr>
+      </p:sp>
+      <p:sp>
+        <p:nvSpPr>
+          <p:cNvPr id="31" name="filter pill 2 text"/>
+          <p:cNvSpPr txBox="1"/>
+          <p:nvPr/>
+        </p:nvSpPr>
+        <p:spPr>
+          <a:xfrm>
+            <a:off x="4838548" y="4617720"/>
+            <a:ext cx="2514600" cy="402336"/>
+          </a:xfrm>
+          <a:prstGeom prst="rect">
+            <a:avLst/>
+          </a:prstGeom>
+          <a:noFill/>
+          <a:ln/>
+        </p:spPr>
+        <p:txBody>
+          <a:bodyPr wrap="square" lIns="0" tIns="0" rIns="0" bIns="0" rtlCol="0" anchor="ctr"/>
+          <a:lstStyle/>
+          <a:p>
+            <a:pPr algn="ctr" indent="0" marL="0">
+              <a:buNone/>
+            </a:pPr>
+            <a:r>
+              <a:rPr lang="en-US" sz="1300" b="1" dirty="0">
+                <a:solidFill>
+                  <a:srgbClr val="FFFFFF"/>
+                </a:solidFill>
+              </a:rPr>
+              <a:t>Manager: managerId = me</a:t>
+            </a:r>
+            <a:endParaRPr lang="en-US" sz="1300" dirty="0"/>
+          </a:p>
+        </p:txBody>
+      </p:sp>
+      <p:sp>
+        <p:nvSpPr>
+          <p:cNvPr id="32" name="filter pill 3"/>
+          <p:cNvSpPr/>
+          <p:nvPr/>
+        </p:nvSpPr>
+        <p:spPr>
+          <a:xfrm>
+            <a:off x="4838548" y="5120640"/>
+            <a:ext cx="2514600" cy="402336"/>
+          </a:xfrm>
+          <a:prstGeom prst="roundRect">
+            <a:avLst>
+              <a:gd name="adj" fmla="val 50000"/>
+            </a:avLst>
+          </a:prstGeom>
+          <a:solidFill>
+            <a:srgbClr val="D97706"/>
+          </a:solidFill>
+          <a:ln w="12700">
+            <a:solidFill>
+              <a:srgbClr val="D97706"/>
+            </a:solidFill>
+            <a:prstDash val="solid"/>
+          </a:ln>
+        </p:spPr>
+      </p:sp>
+      <p:sp>
+        <p:nvSpPr>
+          <p:cNvPr id="33" name="filter pill 3 text"/>
+          <p:cNvSpPr txBox="1"/>
+          <p:nvPr/>
+        </p:nvSpPr>
+        <p:spPr>
+          <a:xfrm>
+            <a:off x="4838548" y="5120640"/>
+            <a:ext cx="2514600" cy="402336"/>
+          </a:xfrm>
+          <a:prstGeom prst="rect">
+            <a:avLst/>
+          </a:prstGeom>
+          <a:noFill/>
+          <a:ln/>
+        </p:spPr>
+        <p:txBody>
+          <a:bodyPr wrap="square" lIns="0" tIns="0" rIns="0" bIns="0" rtlCol="0" anchor="ctr"/>
+          <a:lstStyle/>
+          <a:p>
+            <a:pPr algn="ctr" indent="0" marL="0">
+              <a:buNone/>
+            </a:pPr>
+            <a:r>
+              <a:rPr lang="en-US" sz="1300" b="1" dirty="0">
+                <a:solidFill>
+                  <a:srgbClr val="FFFFFF"/>
+                </a:solidFill>
+              </a:rPr>
+              <a:t>Agent: assigneeId = me</a:t>
+            </a:r>
+            <a:endParaRPr lang="en-US" sz="1300" dirty="0"/>
+          </a:p>
+        </p:txBody>
+      </p:sp>
+      <p:sp>
+        <p:nvSpPr>
+          <p:cNvPr id="25" name="Slide Number Placeholder 0"/>
+          <p:cNvSpPr>
+            <a:spLocks noGrp="1"/>
+          </p:cNvSpPr>
+          <p:nvPr>
+            <p:ph type="sldNum" sz="quarter" idx="4294967295"/>
+          </p:nvPr>
+        </p:nvSpPr>
+        <p:spPr>
+          <a:xfrm>
+            <a:off x="11094415" y="6400800"/>
+            <a:ext cx="548640" cy="274320"/>
+          </a:xfrm>
+          <a:prstGeom prst="rect">
+            <a:avLst/>
+          </a:prstGeom>
+          <a:extLst>
+            <a:ext uri="{C572A759-6A51-4108-AA02-DFA0A04FC94B}">
+              <ma14:wrappingTextBoxFlag xmlns:ma14="http://schemas.microsoft.com/office/mac/drawingml/2011/main" val="0"/>
+            </a:ext>
+          </a:extLst>
+        </p:spPr>
+        <p:txBody>
+          <a:bodyPr/>
+          <a:lstStyle>
+            <a:lvl1pPr>
+              <a:defRPr sz="1000">
+                <a:solidFill>
+                  <a:srgbClr val="64748B"/>
+                </a:solidFill>
+              </a:defRPr>
+            </a:lvl1pPr>
+          </a:lstStyle>
+          <a:p>
+            <a:pPr algn="r"/>
+            <a:fld id="{F7021451-1387-4CA6-816F-3879F97B5CBC}" type="slidenum">
+              <a:rPr b="0" lang="en-US"/>
+              <a:t>13</a:t>
+            </a:fld>
+            <a:endParaRPr lang="en-US"/>
+          </a:p>
+        </p:txBody>
+      </p:sp>
+    </p:spTree>
+  </p:cSld>
+  <p:clrMapOvr>
+    <a:masterClrMapping/>
+  </p:clrMapOvr>
+</p:sld>
+</file>
+
+<file path=ppt/slides/slide14.xml><?xml version="1.0" encoding="utf-8"?>
+<p:sld xmlns:a="http://schemas.openxmlformats.org/drawingml/2006/main" xmlns:r="http://schemas.openxmlformats.org/officeDocument/2006/relationships" xmlns:p="http://schemas.openxmlformats.org/presentationml/2006/main">
+  <p:cSld name="Slide 14">
+    <p:spTree>
+      <p:nvGrpSpPr>
+        <p:cNvPr id="1" name=""/>
+        <p:cNvGrpSpPr/>
+        <p:nvPr/>
+      </p:nvGrpSpPr>
+      <p:grpSpPr>
+        <a:xfrm>
+          <a:off x="0" y="0"/>
+          <a:ext cx="0" cy="0"/>
+          <a:chOff x="0" y="0"/>
+          <a:chExt cx="0" cy="0"/>
+        </a:xfrm>
+      </p:grpSpPr>
+      <p:sp>
+        <p:nvSpPr>
+          <p:cNvPr id="2" name="Text 0"/>
+          <p:cNvSpPr/>
+          <p:nvPr>
+            <p:ph idx="100" type="title" hasCustomPrompt="1"/>
+          </p:nvPr>
+        </p:nvSpPr>
+        <p:spPr>
+          <a:xfrm>
+            <a:off x="548640" y="347472"/>
+            <a:ext cx="11094415" cy="731520"/>
+          </a:xfrm>
+          <a:prstGeom prst="rect">
+            <a:avLst/>
+          </a:prstGeom>
+          <a:noFill/>
+          <a:ln/>
+        </p:spPr>
+        <p:txBody>
+          <a:bodyPr wrap="square" lIns="0" tIns="0" rIns="0" bIns="0" rtlCol="0" anchor="ctr"/>
+          <a:lstStyle/>
+          <a:p>
+            <a:pPr algn="l" indent="0" marL="0">
+              <a:buNone/>
+            </a:pPr>
+            <a:r>
+              <a:rPr lang="en-US" sz="3400" b="1" dirty="0">
+                <a:solidFill>
+                  <a:schemeClr val="tx1"/>
+                </a:solidFill>
+              </a:rPr>
+              <a:t>Data model</a:t>
+            </a:r>
+            <a:endParaRPr lang="en-US" sz="3400" dirty="0"/>
+          </a:p>
+        </p:txBody>
+      </p:sp>
+      <p:sp>
+        <p:nvSpPr>
+          <p:cNvPr id="3" name="entity User"/>
+          <p:cNvSpPr/>
+          <p:nvPr/>
+        </p:nvSpPr>
+        <p:spPr>
+          <a:xfrm>
+            <a:off x="548640" y="1417320"/>
+            <a:ext cx="2743200" cy="2148840"/>
+          </a:xfrm>
+          <a:prstGeom prst="roundRect">
+            <a:avLst>
+              <a:gd name="adj" fmla="val 3404"/>
+            </a:avLst>
+          </a:prstGeom>
+          <a:solidFill>
+            <a:srgbClr val="FFFFFF"/>
+          </a:solidFill>
+          <a:ln w="19050">
+            <a:solidFill>
+              <a:srgbClr val="4F46E5"/>
+            </a:solidFill>
+            <a:prstDash val="solid"/>
+          </a:ln>
+          <a:effectLst>
+            <a:outerShdw sx="100000" sy="100000" kx="0" ky="0" algn="bl" rotWithShape="0" blurRad="101600" dist="25400" dir="5400000">
+              <a:srgbClr val="0F172A">
+                <a:alpha val="12000"/>
+              </a:srgbClr>
+            </a:outerShdw>
+          </a:effectLst>
+        </p:spPr>
+      </p:sp>
+      <p:sp>
+        <p:nvSpPr>
+          <p:cNvPr id="4" name="entity User header"/>
+          <p:cNvSpPr/>
+          <p:nvPr/>
+        </p:nvSpPr>
+        <p:spPr>
+          <a:xfrm>
+            <a:off x="548640" y="1417320"/>
+            <a:ext cx="2743200" cy="457200"/>
+          </a:xfrm>
+          <a:prstGeom prst="roundRect">
+            <a:avLst>
+              <a:gd name="adj" fmla="val 16000"/>
+            </a:avLst>
+          </a:prstGeom>
+          <a:solidFill>
+            <a:srgbClr val="4F46E5"/>
+          </a:solidFill>
+          <a:ln w="12700">
+            <a:solidFill>
+              <a:srgbClr val="4F46E5"/>
+            </a:solidFill>
+            <a:prstDash val="solid"/>
+          </a:ln>
+        </p:spPr>
+      </p:sp>
+      <p:sp>
+        <p:nvSpPr>
+          <p:cNvPr id="5" name="entity User title"/>
+          <p:cNvSpPr txBox="1"/>
+          <p:nvPr/>
+        </p:nvSpPr>
+        <p:spPr>
+          <a:xfrm>
+            <a:off x="548640" y="1417320"/>
+            <a:ext cx="2743200" cy="457200"/>
+          </a:xfrm>
+          <a:prstGeom prst="rect">
+            <a:avLst/>
+          </a:prstGeom>
+          <a:noFill/>
+          <a:ln/>
+        </p:spPr>
+        <p:txBody>
+          <a:bodyPr wrap="square" lIns="0" tIns="0" rIns="0" bIns="0" rtlCol="0" anchor="ctr"/>
+          <a:lstStyle/>
+          <a:p>
+            <a:pPr algn="ctr" indent="0" marL="0">
+              <a:buNone/>
+            </a:pPr>
+            <a:r>
+              <a:rPr lang="en-US" sz="1600" b="1" dirty="0">
+                <a:solidFill>
+                  <a:srgbClr val="FFFFFF"/>
+                </a:solidFill>
+              </a:rPr>
+              <a:t>User</a:t>
+            </a:r>
+            <a:endParaRPr lang="en-US" sz="1600" dirty="0"/>
+          </a:p>
+        </p:txBody>
+      </p:sp>
+      <p:sp>
+        <p:nvSpPr>
+          <p:cNvPr id="6" name="entity User fields"/>
+          <p:cNvSpPr txBox="1"/>
+          <p:nvPr/>
+        </p:nvSpPr>
+        <p:spPr>
+          <a:xfrm>
+            <a:off x="731520" y="1965960"/>
+            <a:ext cx="2377440" cy="1508760"/>
+          </a:xfrm>
+          <a:prstGeom prst="rect">
+            <a:avLst/>
+          </a:prstGeom>
+          <a:noFill/>
+          <a:ln/>
+        </p:spPr>
+        <p:txBody>
+          <a:bodyPr wrap="square" lIns="0" tIns="0" rIns="0" bIns="0" rtlCol="0" anchor="t"/>
+          <a:lstStyle/>
+          <a:p>
+            <a:pPr indent="0" marL="0">
+              <a:spcAft>
+                <a:spcPts val="200"/>
+              </a:spcAft>
+              <a:buNone/>
+            </a:pPr>
+            <a:r>
+              <a:rPr lang="en-US" sz="1300" dirty="0">
+                <a:solidFill>
+                  <a:srgbClr val="334155"/>
+                </a:solidFill>
+              </a:rPr>
+              <a:t>id: ADMIN · PM01 · DEV01</a:t>
+            </a:r>
+            <a:endParaRPr lang="en-US" sz="1300" dirty="0"/>
+          </a:p>
+          <a:p>
+            <a:pPr indent="0" marL="0">
+              <a:spcAft>
+                <a:spcPts val="200"/>
+              </a:spcAft>
+              <a:buNone/>
+            </a:pPr>
+            <a:r>
+              <a:rPr lang="en-US" sz="1300" dirty="0">
+                <a:solidFill>
+                  <a:srgbClr val="334155"/>
+                </a:solidFill>
+              </a:rPr>
+              <a:t>email (unique)</a:t>
+            </a:r>
+            <a:endParaRPr lang="en-US" sz="1300" dirty="0"/>
+          </a:p>
+          <a:p>
+            <a:pPr indent="0" marL="0">
+              <a:spcAft>
+                <a:spcPts val="200"/>
+              </a:spcAft>
+              <a:buNone/>
+            </a:pPr>
+            <a:r>
+              <a:rPr lang="en-US" sz="1300" dirty="0">
+                <a:solidFill>
+                  <a:srgbClr val="334155"/>
+                </a:solidFill>
+              </a:rPr>
+              <a:t>passwordHash</a:t>
+            </a:r>
+            <a:endParaRPr lang="en-US" sz="1300" dirty="0"/>
+          </a:p>
+          <a:p>
+            <a:pPr indent="0" marL="0">
+              <a:spcAft>
+                <a:spcPts val="200"/>
+              </a:spcAft>
+              <a:buNone/>
+            </a:pPr>
+            <a:r>
+              <a:rPr lang="en-US" sz="1300" dirty="0">
+                <a:solidFill>
+                  <a:srgbClr val="334155"/>
+                </a:solidFill>
+              </a:rPr>
+              <a:t>role</a:t>
+            </a:r>
+            <a:endParaRPr lang="en-US" sz="1300" dirty="0"/>
+          </a:p>
+          <a:p>
+            <a:pPr indent="0" marL="0">
+              <a:spcAft>
+                <a:spcPts val="200"/>
+              </a:spcAft>
+              <a:buNone/>
+            </a:pPr>
+            <a:r>
+              <a:rPr lang="en-US" sz="1300" dirty="0">
+                <a:solidFill>
+                  <a:srgbClr val="334155"/>
+                </a:solidFill>
+              </a:rPr>
+              <a:t>skills[]</a:t>
+            </a:r>
+            <a:endParaRPr lang="en-US" sz="1300" dirty="0"/>
+          </a:p>
+        </p:txBody>
+      </p:sp>
+      <p:sp>
+        <p:nvSpPr>
+          <p:cNvPr id="7" name="entity Project"/>
+          <p:cNvSpPr/>
+          <p:nvPr/>
+        </p:nvSpPr>
+        <p:spPr>
+          <a:xfrm>
+            <a:off x="4727448" y="1417320"/>
+            <a:ext cx="2743200" cy="2148840"/>
+          </a:xfrm>
+          <a:prstGeom prst="roundRect">
+            <a:avLst>
+              <a:gd name="adj" fmla="val 3404"/>
+            </a:avLst>
+          </a:prstGeom>
+          <a:solidFill>
+            <a:srgbClr val="FFFFFF"/>
+          </a:solidFill>
+          <a:ln w="19050">
+            <a:solidFill>
+              <a:srgbClr val="4F46E5"/>
+            </a:solidFill>
+            <a:prstDash val="solid"/>
+          </a:ln>
+          <a:effectLst>
+            <a:outerShdw sx="100000" sy="100000" kx="0" ky="0" algn="bl" rotWithShape="0" blurRad="101600" dist="25400" dir="5400000">
+              <a:srgbClr val="0F172A">
+                <a:alpha val="12000"/>
+              </a:srgbClr>
+            </a:outerShdw>
+          </a:effectLst>
+        </p:spPr>
+      </p:sp>
+      <p:sp>
+        <p:nvSpPr>
+          <p:cNvPr id="8" name="entity Project header"/>
+          <p:cNvSpPr/>
+          <p:nvPr/>
+        </p:nvSpPr>
+        <p:spPr>
+          <a:xfrm>
+            <a:off x="4727448" y="1417320"/>
+            <a:ext cx="2743200" cy="457200"/>
+          </a:xfrm>
+          <a:prstGeom prst="roundRect">
+            <a:avLst>
+              <a:gd name="adj" fmla="val 16000"/>
+            </a:avLst>
+          </a:prstGeom>
+          <a:solidFill>
+            <a:srgbClr val="4F46E5"/>
+          </a:solidFill>
+          <a:ln w="12700">
+            <a:solidFill>
+              <a:srgbClr val="4F46E5"/>
+            </a:solidFill>
+            <a:prstDash val="solid"/>
+          </a:ln>
+        </p:spPr>
+      </p:sp>
+      <p:sp>
+        <p:nvSpPr>
+          <p:cNvPr id="9" name="entity Project title"/>
+          <p:cNvSpPr txBox="1"/>
+          <p:nvPr/>
+        </p:nvSpPr>
+        <p:spPr>
+          <a:xfrm>
+            <a:off x="4727448" y="1417320"/>
+            <a:ext cx="2743200" cy="457200"/>
+          </a:xfrm>
+          <a:prstGeom prst="rect">
+            <a:avLst/>
+          </a:prstGeom>
+          <a:noFill/>
+          <a:ln/>
+        </p:spPr>
+        <p:txBody>
+          <a:bodyPr wrap="square" lIns="0" tIns="0" rIns="0" bIns="0" rtlCol="0" anchor="ctr"/>
+          <a:lstStyle/>
+          <a:p>
+            <a:pPr algn="ctr" indent="0" marL="0">
+              <a:buNone/>
+            </a:pPr>
+            <a:r>
+              <a:rPr lang="en-US" sz="1600" b="1" dirty="0">
+                <a:solidFill>
+                  <a:srgbClr val="FFFFFF"/>
+                </a:solidFill>
+              </a:rPr>
+              <a:t>Project</a:t>
+            </a:r>
+            <a:endParaRPr lang="en-US" sz="1600" dirty="0"/>
+          </a:p>
+        </p:txBody>
+      </p:sp>
+      <p:sp>
+        <p:nvSpPr>
+          <p:cNvPr id="10" name="entity Project fields"/>
+          <p:cNvSpPr txBox="1"/>
+          <p:nvPr/>
+        </p:nvSpPr>
+        <p:spPr>
+          <a:xfrm>
+            <a:off x="4910328" y="1965960"/>
+            <a:ext cx="2377440" cy="1508760"/>
+          </a:xfrm>
+          <a:prstGeom prst="rect">
+            <a:avLst/>
+          </a:prstGeom>
+          <a:noFill/>
+          <a:ln/>
+        </p:spPr>
+        <p:txBody>
+          <a:bodyPr wrap="square" lIns="0" tIns="0" rIns="0" bIns="0" rtlCol="0" anchor="t"/>
+          <a:lstStyle/>
+          <a:p>
+            <a:pPr indent="0" marL="0">
+              <a:spcAft>
+                <a:spcPts val="200"/>
+              </a:spcAft>
+              <a:buNone/>
+            </a:pPr>
+            <a:r>
+              <a:rPr lang="en-US" sz="1300" dirty="0">
+                <a:solidFill>
+                  <a:srgbClr val="334155"/>
+                </a:solidFill>
+              </a:rPr>
+              <a:t>name · clientName</a:t>
+            </a:r>
+            <a:endParaRPr lang="en-US" sz="1300" dirty="0"/>
+          </a:p>
+          <a:p>
+            <a:pPr indent="0" marL="0">
+              <a:spcAft>
+                <a:spcPts val="200"/>
+              </a:spcAft>
+              <a:buNone/>
+            </a:pPr>
+            <a:r>
+              <a:rPr lang="en-US" sz="1300" dirty="0">
+                <a:solidFill>
+                  <a:srgbClr val="334155"/>
+                </a:solidFill>
+              </a:rPr>
+              <a:t>managerId → User</a:t>
+            </a:r>
+            <a:endParaRPr lang="en-US" sz="1300" dirty="0"/>
+          </a:p>
+          <a:p>
+            <a:pPr indent="0" marL="0">
+              <a:spcAft>
+                <a:spcPts val="200"/>
+              </a:spcAft>
+              <a:buNone/>
+            </a:pPr>
+            <a:r>
+              <a:rPr lang="en-US" sz="1300" dirty="0">
+                <a:solidFill>
+                  <a:srgbClr val="334155"/>
+                </a:solidFill>
+              </a:rPr>
+              <a:t>clientId → Client</a:t>
+            </a:r>
+            <a:endParaRPr lang="en-US" sz="1300" dirty="0"/>
+          </a:p>
+          <a:p>
+            <a:pPr indent="0" marL="0">
+              <a:spcAft>
+                <a:spcPts val="200"/>
+              </a:spcAft>
+              <a:buNone/>
+            </a:pPr>
+            <a:r>
+              <a:rPr lang="en-US" sz="1300" dirty="0">
+                <a:solidFill>
+                  <a:srgbClr val="334155"/>
+                </a:solidFill>
+              </a:rPr>
+              <a:t>deadline</a:t>
+            </a:r>
+            <a:endParaRPr lang="en-US" sz="1300" dirty="0"/>
+          </a:p>
+          <a:p>
+            <a:pPr indent="0" marL="0">
+              <a:spcAft>
+                <a:spcPts val="200"/>
+              </a:spcAft>
+              <a:buNone/>
+            </a:pPr>
+            <a:r>
+              <a:rPr lang="en-US" sz="1300" dirty="0">
+                <a:solidFill>
+                  <a:srgbClr val="334155"/>
+                </a:solidFill>
+              </a:rPr>
+              <a:t>transcriptRunId</a:t>
+            </a:r>
+            <a:endParaRPr lang="en-US" sz="1300" dirty="0"/>
+          </a:p>
+        </p:txBody>
+      </p:sp>
+      <p:sp>
+        <p:nvSpPr>
+          <p:cNvPr id="11" name="entity Client"/>
+          <p:cNvSpPr/>
+          <p:nvPr/>
+        </p:nvSpPr>
+        <p:spPr>
+          <a:xfrm>
+            <a:off x="8899855" y="1417320"/>
+            <a:ext cx="2743200" cy="2148840"/>
+          </a:xfrm>
+          <a:prstGeom prst="roundRect">
+            <a:avLst>
+              <a:gd name="adj" fmla="val 3404"/>
+            </a:avLst>
+          </a:prstGeom>
+          <a:solidFill>
+            <a:srgbClr val="FFFFFF"/>
+          </a:solidFill>
+          <a:ln w="19050">
+            <a:solidFill>
+              <a:srgbClr val="0D9488"/>
+            </a:solidFill>
+            <a:prstDash val="solid"/>
+          </a:ln>
+          <a:effectLst>
+            <a:outerShdw sx="100000" sy="100000" kx="0" ky="0" algn="bl" rotWithShape="0" blurRad="101600" dist="25400" dir="5400000">
+              <a:srgbClr val="0F172A">
+                <a:alpha val="12000"/>
+              </a:srgbClr>
+            </a:outerShdw>
+          </a:effectLst>
+        </p:spPr>
+      </p:sp>
+      <p:sp>
+        <p:nvSpPr>
+          <p:cNvPr id="12" name="entity Client header"/>
+          <p:cNvSpPr/>
+          <p:nvPr/>
+        </p:nvSpPr>
+        <p:spPr>
+          <a:xfrm>
+            <a:off x="8899855" y="1417320"/>
+            <a:ext cx="2743200" cy="457200"/>
+          </a:xfrm>
+          <a:prstGeom prst="roundRect">
+            <a:avLst>
+              <a:gd name="adj" fmla="val 16000"/>
+            </a:avLst>
+          </a:prstGeom>
+          <a:solidFill>
+            <a:srgbClr val="0D9488"/>
+          </a:solidFill>
+          <a:ln w="12700">
+            <a:solidFill>
+              <a:srgbClr val="0D9488"/>
+            </a:solidFill>
+            <a:prstDash val="solid"/>
+          </a:ln>
+        </p:spPr>
+      </p:sp>
+      <p:sp>
+        <p:nvSpPr>
+          <p:cNvPr id="13" name="entity Client title"/>
+          <p:cNvSpPr txBox="1"/>
+          <p:nvPr/>
+        </p:nvSpPr>
+        <p:spPr>
+          <a:xfrm>
+            <a:off x="8899855" y="1417320"/>
+            <a:ext cx="2743200" cy="457200"/>
+          </a:xfrm>
+          <a:prstGeom prst="rect">
+            <a:avLst/>
+          </a:prstGeom>
+          <a:noFill/>
+          <a:ln/>
+        </p:spPr>
+        <p:txBody>
+          <a:bodyPr wrap="square" lIns="0" tIns="0" rIns="0" bIns="0" rtlCol="0" anchor="ctr"/>
+          <a:lstStyle/>
+          <a:p>
+            <a:pPr algn="ctr" indent="0" marL="0">
+              <a:buNone/>
+            </a:pPr>
+            <a:r>
+              <a:rPr lang="en-US" sz="1600" b="1" dirty="0">
+                <a:solidFill>
+                  <a:srgbClr val="FFFFFF"/>
+                </a:solidFill>
+              </a:rPr>
+              <a:t>Client</a:t>
+            </a:r>
+            <a:endParaRPr lang="en-US" sz="1600" dirty="0"/>
+          </a:p>
+        </p:txBody>
+      </p:sp>
+      <p:sp>
+        <p:nvSpPr>
+          <p:cNvPr id="14" name="entity Client fields"/>
+          <p:cNvSpPr txBox="1"/>
+          <p:nvPr/>
+        </p:nvSpPr>
+        <p:spPr>
+          <a:xfrm>
+            <a:off x="9082735" y="1965960"/>
+            <a:ext cx="2377440" cy="1508760"/>
+          </a:xfrm>
+          <a:prstGeom prst="rect">
+            <a:avLst/>
+          </a:prstGeom>
+          <a:noFill/>
+          <a:ln/>
+        </p:spPr>
+        <p:txBody>
+          <a:bodyPr wrap="square" lIns="0" tIns="0" rIns="0" bIns="0" rtlCol="0" anchor="t"/>
+          <a:lstStyle/>
+          <a:p>
+            <a:pPr indent="0" marL="0">
+              <a:spcAft>
+                <a:spcPts val="200"/>
+              </a:spcAft>
+              <a:buNone/>
+            </a:pPr>
+            <a:r>
+              <a:rPr lang="en-US" sz="1300" dirty="0">
+                <a:solidFill>
+                  <a:srgbClr val="334155"/>
+                </a:solidFill>
+              </a:rPr>
+              <a:t>name (unique)</a:t>
+            </a:r>
+            <a:endParaRPr lang="en-US" sz="1300" dirty="0"/>
+          </a:p>
+          <a:p>
+            <a:pPr indent="0" marL="0">
+              <a:spcAft>
+                <a:spcPts val="200"/>
+              </a:spcAft>
+              <a:buNone/>
+            </a:pPr>
+            <a:r>
+              <a:rPr lang="en-US" sz="1300" dirty="0">
+                <a:solidFill>
+                  <a:srgbClr val="334155"/>
+                </a:solidFill>
+              </a:rPr>
+              <a:t>industry</a:t>
+            </a:r>
+            <a:endParaRPr lang="en-US" sz="1300" dirty="0"/>
+          </a:p>
+          <a:p>
+            <a:pPr indent="0" marL="0">
+              <a:spcAft>
+                <a:spcPts val="200"/>
+              </a:spcAft>
+              <a:buNone/>
+            </a:pPr>
+            <a:r>
+              <a:rPr lang="en-US" sz="1300" dirty="0">
+                <a:solidFill>
+                  <a:srgbClr val="334155"/>
+                </a:solidFill>
+              </a:rPr>
+              <a:t>contact name / email</a:t>
+            </a:r>
+            <a:endParaRPr lang="en-US" sz="1300" dirty="0"/>
+          </a:p>
+          <a:p>
+            <a:pPr indent="0" marL="0">
+              <a:spcAft>
+                <a:spcPts val="200"/>
+              </a:spcAft>
+              <a:buNone/>
+            </a:pPr>
+            <a:r>
+              <a:rPr lang="en-US" sz="1300" dirty="0">
+                <a:solidFill>
+                  <a:srgbClr val="334155"/>
+                </a:solidFill>
+              </a:rPr>
+              <a:t>phone · website</a:t>
+            </a:r>
+            <a:endParaRPr lang="en-US" sz="1300" dirty="0"/>
+          </a:p>
+          <a:p>
+            <a:pPr indent="0" marL="0">
+              <a:spcAft>
+                <a:spcPts val="200"/>
+              </a:spcAft>
+              <a:buNone/>
+            </a:pPr>
+            <a:r>
+              <a:rPr lang="en-US" sz="1300" dirty="0">
+                <a:solidFill>
+                  <a:srgbClr val="334155"/>
+                </a:solidFill>
+              </a:rPr>
+              <a:t>notes</a:t>
+            </a:r>
+            <a:endParaRPr lang="en-US" sz="1300" dirty="0"/>
+          </a:p>
+        </p:txBody>
+      </p:sp>
+      <p:sp>
+        <p:nvSpPr>
+          <p:cNvPr id="15" name="entity Task"/>
+          <p:cNvSpPr/>
+          <p:nvPr/>
+        </p:nvSpPr>
+        <p:spPr>
+          <a:xfrm>
+            <a:off x="4727448" y="4160520"/>
+            <a:ext cx="2743200" cy="1874520"/>
+          </a:xfrm>
+          <a:prstGeom prst="roundRect">
+            <a:avLst>
+              <a:gd name="adj" fmla="val 3902"/>
+            </a:avLst>
+          </a:prstGeom>
+          <a:solidFill>
+            <a:srgbClr val="FFFFFF"/>
+          </a:solidFill>
+          <a:ln w="19050">
+            <a:solidFill>
+              <a:srgbClr val="D97706"/>
+            </a:solidFill>
+            <a:prstDash val="solid"/>
+          </a:ln>
+          <a:effectLst>
+            <a:outerShdw sx="100000" sy="100000" kx="0" ky="0" algn="bl" rotWithShape="0" blurRad="101600" dist="25400" dir="5400000">
+              <a:srgbClr val="0F172A">
+                <a:alpha val="12000"/>
+              </a:srgbClr>
+            </a:outerShdw>
+          </a:effectLst>
+        </p:spPr>
+      </p:sp>
+      <p:sp>
+        <p:nvSpPr>
+          <p:cNvPr id="16" name="entity Task header"/>
+          <p:cNvSpPr/>
+          <p:nvPr/>
+        </p:nvSpPr>
+        <p:spPr>
+          <a:xfrm>
+            <a:off x="4727448" y="4160520"/>
+            <a:ext cx="2743200" cy="457200"/>
+          </a:xfrm>
+          <a:prstGeom prst="roundRect">
+            <a:avLst>
+              <a:gd name="adj" fmla="val 16000"/>
+            </a:avLst>
+          </a:prstGeom>
+          <a:solidFill>
+            <a:srgbClr val="D97706"/>
+          </a:solidFill>
+          <a:ln w="12700">
+            <a:solidFill>
+              <a:srgbClr val="D97706"/>
+            </a:solidFill>
+            <a:prstDash val="solid"/>
+          </a:ln>
+        </p:spPr>
+      </p:sp>
+      <p:sp>
+        <p:nvSpPr>
+          <p:cNvPr id="17" name="entity Task title"/>
+          <p:cNvSpPr txBox="1"/>
+          <p:nvPr/>
+        </p:nvSpPr>
+        <p:spPr>
+          <a:xfrm>
+            <a:off x="4727448" y="4160520"/>
+            <a:ext cx="2743200" cy="457200"/>
+          </a:xfrm>
+          <a:prstGeom prst="rect">
+            <a:avLst/>
+          </a:prstGeom>
+          <a:noFill/>
+          <a:ln/>
+        </p:spPr>
+        <p:txBody>
+          <a:bodyPr wrap="square" lIns="0" tIns="0" rIns="0" bIns="0" rtlCol="0" anchor="ctr"/>
+          <a:lstStyle/>
+          <a:p>
+            <a:pPr algn="ctr" indent="0" marL="0">
+              <a:buNone/>
+            </a:pPr>
+            <a:r>
+              <a:rPr lang="en-US" sz="1600" b="1" dirty="0">
+                <a:solidFill>
+                  <a:srgbClr val="FFFFFF"/>
+                </a:solidFill>
+              </a:rPr>
+              <a:t>Task</a:t>
+            </a:r>
+            <a:endParaRPr lang="en-US" sz="1600" dirty="0"/>
+          </a:p>
+        </p:txBody>
+      </p:sp>
+      <p:sp>
+        <p:nvSpPr>
+          <p:cNvPr id="18" name="entity Task fields"/>
+          <p:cNvSpPr txBox="1"/>
+          <p:nvPr/>
+        </p:nvSpPr>
+        <p:spPr>
+          <a:xfrm>
+            <a:off x="4910328" y="4709160"/>
+            <a:ext cx="2377440" cy="1234440"/>
+          </a:xfrm>
+          <a:prstGeom prst="rect">
+            <a:avLst/>
+          </a:prstGeom>
+          <a:noFill/>
+          <a:ln/>
+        </p:spPr>
+        <p:txBody>
+          <a:bodyPr wrap="square" lIns="0" tIns="0" rIns="0" bIns="0" rtlCol="0" anchor="t"/>
+          <a:lstStyle/>
+          <a:p>
+            <a:pPr indent="0" marL="0">
+              <a:spcAft>
+                <a:spcPts val="200"/>
+              </a:spcAft>
+              <a:buNone/>
+            </a:pPr>
+            <a:r>
+              <a:rPr lang="en-US" sz="1300" dirty="0">
+                <a:solidFill>
+                  <a:srgbClr val="334155"/>
+                </a:solidFill>
+              </a:rPr>
+              <a:t>projectId → Project</a:t>
+            </a:r>
+            <a:endParaRPr lang="en-US" sz="1300" dirty="0"/>
+          </a:p>
+          <a:p>
+            <a:pPr indent="0" marL="0">
+              <a:spcAft>
+                <a:spcPts val="200"/>
+              </a:spcAft>
+              <a:buNone/>
+            </a:pPr>
+            <a:r>
+              <a:rPr lang="en-US" sz="1300" dirty="0">
+                <a:solidFill>
+                  <a:srgbClr val="334155"/>
+                </a:solidFill>
+              </a:rPr>
+              <a:t>assigneeId → User</a:t>
+            </a:r>
+            <a:endParaRPr lang="en-US" sz="1300" dirty="0"/>
+          </a:p>
+          <a:p>
+            <a:pPr indent="0" marL="0">
+              <a:spcAft>
+                <a:spcPts val="200"/>
+              </a:spcAft>
+              <a:buNone/>
+            </a:pPr>
+            <a:r>
+              <a:rPr lang="en-US" sz="1300" dirty="0">
+                <a:solidFill>
+                  <a:srgbClr val="334155"/>
+                </a:solidFill>
+              </a:rPr>
+              <a:t>deadline</a:t>
+            </a:r>
+            <a:endParaRPr lang="en-US" sz="1300" dirty="0"/>
+          </a:p>
+          <a:p>
+            <a:pPr indent="0" marL="0">
+              <a:spcAft>
+                <a:spcPts val="200"/>
+              </a:spcAft>
+              <a:buNone/>
+            </a:pPr>
+            <a:r>
+              <a:rPr lang="en-US" sz="1300" dirty="0">
+                <a:solidFill>
+                  <a:srgbClr val="334155"/>
+                </a:solidFill>
+              </a:rPr>
+              <a:t>estimatedHours</a:t>
+            </a:r>
+            <a:endParaRPr lang="en-US" sz="1300" dirty="0"/>
+          </a:p>
+        </p:txBody>
+      </p:sp>
+      <p:sp>
+        <p:nvSpPr>
+          <p:cNvPr id="19" name="entity TranscriptRun"/>
+          <p:cNvSpPr/>
+          <p:nvPr/>
+        </p:nvSpPr>
+        <p:spPr>
+          <a:xfrm>
+            <a:off x="8899855" y="4160520"/>
+            <a:ext cx="2743200" cy="1874520"/>
+          </a:xfrm>
+          <a:prstGeom prst="roundRect">
+            <a:avLst>
+              <a:gd name="adj" fmla="val 3902"/>
+            </a:avLst>
+          </a:prstGeom>
+          <a:solidFill>
+            <a:srgbClr val="FFFFFF"/>
+          </a:solidFill>
+          <a:ln w="19050">
+            <a:solidFill>
+              <a:srgbClr val="64748B"/>
+            </a:solidFill>
+            <a:prstDash val="solid"/>
+          </a:ln>
+          <a:effectLst>
+            <a:outerShdw sx="100000" sy="100000" kx="0" ky="0" algn="bl" rotWithShape="0" blurRad="101600" dist="25400" dir="5400000">
+              <a:srgbClr val="0F172A">
+                <a:alpha val="12000"/>
+              </a:srgbClr>
+            </a:outerShdw>
+          </a:effectLst>
+        </p:spPr>
+      </p:sp>
+      <p:sp>
+        <p:nvSpPr>
+          <p:cNvPr id="20" name="entity TranscriptRun header"/>
+          <p:cNvSpPr/>
+          <p:nvPr/>
+        </p:nvSpPr>
+        <p:spPr>
+          <a:xfrm>
+            <a:off x="8899855" y="4160520"/>
+            <a:ext cx="2743200" cy="457200"/>
+          </a:xfrm>
+          <a:prstGeom prst="roundRect">
+            <a:avLst>
+              <a:gd name="adj" fmla="val 16000"/>
+            </a:avLst>
+          </a:prstGeom>
+          <a:solidFill>
+            <a:srgbClr val="64748B"/>
+          </a:solidFill>
+          <a:ln w="12700">
+            <a:solidFill>
+              <a:srgbClr val="64748B"/>
+            </a:solidFill>
+            <a:prstDash val="solid"/>
+          </a:ln>
+        </p:spPr>
+      </p:sp>
+      <p:sp>
+        <p:nvSpPr>
+          <p:cNvPr id="21" name="entity TranscriptRun title"/>
+          <p:cNvSpPr txBox="1"/>
+          <p:nvPr/>
+        </p:nvSpPr>
+        <p:spPr>
+          <a:xfrm>
+            <a:off x="8899855" y="4160520"/>
+            <a:ext cx="2743200" cy="457200"/>
+          </a:xfrm>
+          <a:prstGeom prst="rect">
+            <a:avLst/>
+          </a:prstGeom>
+          <a:noFill/>
+          <a:ln/>
+        </p:spPr>
+        <p:txBody>
+          <a:bodyPr wrap="square" lIns="0" tIns="0" rIns="0" bIns="0" rtlCol="0" anchor="ctr"/>
+          <a:lstStyle/>
+          <a:p>
+            <a:pPr algn="ctr" indent="0" marL="0">
+              <a:buNone/>
+            </a:pPr>
+            <a:r>
+              <a:rPr lang="en-US" sz="1600" b="1" dirty="0">
+                <a:solidFill>
+                  <a:srgbClr val="FFFFFF"/>
+                </a:solidFill>
+              </a:rPr>
+              <a:t>TranscriptRun</a:t>
+            </a:r>
+            <a:endParaRPr lang="en-US" sz="1600" dirty="0"/>
+          </a:p>
+        </p:txBody>
+      </p:sp>
+      <p:sp>
+        <p:nvSpPr>
+          <p:cNvPr id="22" name="entity TranscriptRun fields"/>
+          <p:cNvSpPr txBox="1"/>
+          <p:nvPr/>
+        </p:nvSpPr>
+        <p:spPr>
+          <a:xfrm>
+            <a:off x="9082735" y="4709160"/>
+            <a:ext cx="2377440" cy="1234440"/>
+          </a:xfrm>
+          <a:prstGeom prst="rect">
+            <a:avLst/>
+          </a:prstGeom>
+          <a:noFill/>
+          <a:ln/>
+        </p:spPr>
+        <p:txBody>
+          <a:bodyPr wrap="square" lIns="0" tIns="0" rIns="0" bIns="0" rtlCol="0" anchor="t"/>
+          <a:lstStyle/>
+          <a:p>
+            <a:pPr indent="0" marL="0">
+              <a:spcAft>
+                <a:spcPts val="200"/>
+              </a:spcAft>
+              <a:buNone/>
+            </a:pPr>
+            <a:r>
+              <a:rPr lang="en-US" sz="1300" dirty="0">
+                <a:solidFill>
+                  <a:srgbClr val="334155"/>
+                </a:solidFill>
+              </a:rPr>
+              <a:t>transcript · aiOutput</a:t>
+            </a:r>
+            <a:endParaRPr lang="en-US" sz="1300" dirty="0"/>
+          </a:p>
+          <a:p>
+            <a:pPr indent="0" marL="0">
+              <a:spcAft>
+                <a:spcPts val="200"/>
+              </a:spcAft>
+              <a:buNone/>
+            </a:pPr>
+            <a:r>
+              <a:rPr lang="en-US" sz="1300" dirty="0">
+                <a:solidFill>
+                  <a:srgbClr val="334155"/>
+                </a:solidFill>
+              </a:rPr>
+              <a:t>model · status</a:t>
+            </a:r>
+            <a:endParaRPr lang="en-US" sz="1300" dirty="0"/>
+          </a:p>
+          <a:p>
+            <a:pPr indent="0" marL="0">
+              <a:spcAft>
+                <a:spcPts val="200"/>
+              </a:spcAft>
+              <a:buNone/>
+            </a:pPr>
+            <a:r>
+              <a:rPr lang="en-US" sz="1300" dirty="0">
+                <a:solidFill>
+                  <a:srgbClr val="334155"/>
+                </a:solidFill>
+              </a:rPr>
+              <a:t>issues[]</a:t>
+            </a:r>
+            <a:endParaRPr lang="en-US" sz="1300" dirty="0"/>
+          </a:p>
+        </p:txBody>
+      </p:sp>
+      <p:sp>
+        <p:nvSpPr>
+          <p:cNvPr id="23" name="diagram arrow 65"/>
+          <p:cNvSpPr/>
+          <p:nvPr/>
+        </p:nvSpPr>
+        <p:spPr>
+          <a:xfrm>
+            <a:off x="3291840" y="2194560"/>
+            <a:ext cx="1435608" cy="914"/>
+          </a:xfrm>
+          <a:prstGeom prst="line">
+            <a:avLst/>
+          </a:prstGeom>
+          <a:noFill/>
+          <a:ln w="22225">
+            <a:solidFill>
+              <a:srgbClr val="64748B"/>
+            </a:solidFill>
+            <a:prstDash val="solid"/>
+            <a:tailEnd type="triangle"/>
+          </a:ln>
+        </p:spPr>
+      </p:sp>
+      <p:sp>
+        <p:nvSpPr>
+          <p:cNvPr id="24" name="diagram note 66"/>
+          <p:cNvSpPr txBox="1"/>
+          <p:nvPr/>
+        </p:nvSpPr>
+        <p:spPr>
+          <a:xfrm>
+            <a:off x="3291840" y="1874520"/>
+            <a:ext cx="1435608" cy="292608"/>
+          </a:xfrm>
+          <a:prstGeom prst="rect">
+            <a:avLst/>
+          </a:prstGeom>
+          <a:noFill/>
+          <a:ln/>
+        </p:spPr>
+        <p:txBody>
+          <a:bodyPr wrap="square" lIns="0" tIns="0" rIns="0" bIns="0" rtlCol="0" anchor="ctr"/>
+          <a:lstStyle/>
+          <a:p>
+            <a:pPr algn="ctr" indent="0" marL="0">
+              <a:buNone/>
+            </a:pPr>
+            <a:r>
+              <a:rPr lang="en-US" sz="1200" dirty="0">
+                <a:solidFill>
+                  <a:srgbClr val="475569"/>
+                </a:solidFill>
+              </a:rPr>
+              <a:t>manages 1:n</a:t>
+            </a:r>
+            <a:endParaRPr lang="en-US" sz="1200" dirty="0"/>
+          </a:p>
+        </p:txBody>
+      </p:sp>
+      <p:sp>
+        <p:nvSpPr>
+          <p:cNvPr id="25" name="diagram arrow 67"/>
+          <p:cNvSpPr/>
+          <p:nvPr/>
+        </p:nvSpPr>
+        <p:spPr>
+          <a:xfrm flipH="1">
+            <a:off x="7470648" y="2194560"/>
+            <a:ext cx="1429207" cy="914"/>
+          </a:xfrm>
+          <a:prstGeom prst="line">
+            <a:avLst/>
+          </a:prstGeom>
+          <a:noFill/>
+          <a:ln w="22225">
+            <a:solidFill>
+              <a:srgbClr val="64748B"/>
+            </a:solidFill>
+            <a:prstDash val="solid"/>
+            <a:tailEnd type="triangle"/>
+          </a:ln>
+        </p:spPr>
+      </p:sp>
+      <p:sp>
+        <p:nvSpPr>
+          <p:cNvPr id="26" name="diagram note 68"/>
+          <p:cNvSpPr txBox="1"/>
+          <p:nvPr/>
+        </p:nvSpPr>
+        <p:spPr>
+          <a:xfrm>
+            <a:off x="7470648" y="1874520"/>
+            <a:ext cx="1429207" cy="292608"/>
+          </a:xfrm>
+          <a:prstGeom prst="rect">
+            <a:avLst/>
+          </a:prstGeom>
+          <a:noFill/>
+          <a:ln/>
+        </p:spPr>
+        <p:txBody>
+          <a:bodyPr wrap="square" lIns="0" tIns="0" rIns="0" bIns="0" rtlCol="0" anchor="ctr"/>
+          <a:lstStyle/>
+          <a:p>
+            <a:pPr algn="ctr" indent="0" marL="0">
+              <a:buNone/>
+            </a:pPr>
+            <a:r>
+              <a:rPr lang="en-US" sz="1200" dirty="0">
+                <a:solidFill>
+                  <a:srgbClr val="475569"/>
+                </a:solidFill>
+              </a:rPr>
+              <a:t>has 1:n</a:t>
+            </a:r>
+            <a:endParaRPr lang="en-US" sz="1200" dirty="0"/>
+          </a:p>
+        </p:txBody>
+      </p:sp>
+      <p:sp>
+        <p:nvSpPr>
+          <p:cNvPr id="27" name="diagram arrow 69"/>
+          <p:cNvSpPr/>
+          <p:nvPr/>
+        </p:nvSpPr>
+        <p:spPr>
+          <a:xfrm>
+            <a:off x="6099048" y="3566160"/>
+            <a:ext cx="914" cy="594360"/>
+          </a:xfrm>
+          <a:prstGeom prst="line">
+            <a:avLst/>
+          </a:prstGeom>
+          <a:noFill/>
+          <a:ln w="22225">
+            <a:solidFill>
+              <a:srgbClr val="64748B"/>
+            </a:solidFill>
+            <a:prstDash val="solid"/>
+            <a:tailEnd type="triangle"/>
+          </a:ln>
+        </p:spPr>
+      </p:sp>
+      <p:sp>
+        <p:nvSpPr>
+          <p:cNvPr id="28" name="diagram note 70"/>
+          <p:cNvSpPr txBox="1"/>
+          <p:nvPr/>
+        </p:nvSpPr>
+        <p:spPr>
+          <a:xfrm>
+            <a:off x="6190488" y="3703320"/>
+            <a:ext cx="1280160" cy="292608"/>
+          </a:xfrm>
+          <a:prstGeom prst="rect">
+            <a:avLst/>
+          </a:prstGeom>
+          <a:noFill/>
+          <a:ln/>
+        </p:spPr>
+        <p:txBody>
+          <a:bodyPr wrap="square" lIns="0" tIns="0" rIns="0" bIns="0" rtlCol="0" anchor="ctr"/>
+          <a:lstStyle/>
+          <a:p>
+            <a:pPr algn="l" indent="0" marL="0">
+              <a:buNone/>
+            </a:pPr>
+            <a:r>
+              <a:rPr lang="en-US" sz="1200" dirty="0">
+                <a:solidFill>
+                  <a:srgbClr val="475569"/>
+                </a:solidFill>
+              </a:rPr>
+              <a:t>contains 1:n</a:t>
+            </a:r>
+            <a:endParaRPr lang="en-US" sz="1200" dirty="0"/>
+          </a:p>
+        </p:txBody>
+      </p:sp>
+      <p:sp>
+        <p:nvSpPr>
+          <p:cNvPr id="29" name="diagram arrow 71"/>
+          <p:cNvSpPr/>
+          <p:nvPr/>
+        </p:nvSpPr>
+        <p:spPr>
+          <a:xfrm>
+            <a:off x="1920240" y="3566160"/>
+            <a:ext cx="914" cy="1508760"/>
+          </a:xfrm>
+          <a:prstGeom prst="line">
+            <a:avLst/>
+          </a:prstGeom>
+          <a:noFill/>
+          <a:ln w="22225">
+            <a:solidFill>
+              <a:srgbClr val="64748B"/>
+            </a:solidFill>
+            <a:prstDash val="solid"/>
+          </a:ln>
+        </p:spPr>
+      </p:sp>
+      <p:sp>
+        <p:nvSpPr>
+          <p:cNvPr id="30" name="diagram arrow 72"/>
+          <p:cNvSpPr/>
+          <p:nvPr/>
+        </p:nvSpPr>
+        <p:spPr>
+          <a:xfrm>
+            <a:off x="1920240" y="5074920"/>
+            <a:ext cx="2807208" cy="914"/>
+          </a:xfrm>
+          <a:prstGeom prst="line">
+            <a:avLst/>
+          </a:prstGeom>
+          <a:noFill/>
+          <a:ln w="22225">
+            <a:solidFill>
+              <a:srgbClr val="64748B"/>
+            </a:solidFill>
+            <a:prstDash val="solid"/>
+            <a:tailEnd type="triangle"/>
+          </a:ln>
+        </p:spPr>
+      </p:sp>
+      <p:sp>
+        <p:nvSpPr>
+          <p:cNvPr id="31" name="diagram note 73"/>
+          <p:cNvSpPr txBox="1"/>
+          <p:nvPr/>
+        </p:nvSpPr>
+        <p:spPr>
+          <a:xfrm>
+            <a:off x="2011680" y="4754880"/>
+            <a:ext cx="2011680" cy="292608"/>
+          </a:xfrm>
+          <a:prstGeom prst="rect">
+            <a:avLst/>
+          </a:prstGeom>
+          <a:noFill/>
+          <a:ln/>
+        </p:spPr>
+        <p:txBody>
+          <a:bodyPr wrap="square" lIns="0" tIns="0" rIns="0" bIns="0" rtlCol="0" anchor="ctr"/>
+          <a:lstStyle/>
+          <a:p>
+            <a:pPr algn="l" indent="0" marL="0">
+              <a:buNone/>
+            </a:pPr>
+            <a:r>
+              <a:rPr lang="en-US" sz="1200" dirty="0">
+                <a:solidFill>
+                  <a:srgbClr val="475569"/>
+                </a:solidFill>
+              </a:rPr>
+              <a:t>assigned 1:n</a:t>
+            </a:r>
+            <a:endParaRPr lang="en-US" sz="1200" dirty="0"/>
+          </a:p>
+        </p:txBody>
+      </p:sp>
+      <p:sp>
+        <p:nvSpPr>
+          <p:cNvPr id="32" name="diagram arrow 74"/>
+          <p:cNvSpPr/>
+          <p:nvPr/>
+        </p:nvSpPr>
+        <p:spPr>
+          <a:xfrm flipV="1">
+            <a:off x="10271455" y="3840480"/>
+            <a:ext cx="914" cy="320040"/>
+          </a:xfrm>
+          <a:prstGeom prst="line">
+            <a:avLst/>
+          </a:prstGeom>
+          <a:noFill/>
+          <a:ln w="22225">
+            <a:solidFill>
+              <a:srgbClr val="64748B"/>
+            </a:solidFill>
+            <a:prstDash val="dash"/>
+          </a:ln>
+        </p:spPr>
+      </p:sp>
+      <p:sp>
+        <p:nvSpPr>
+          <p:cNvPr id="33" name="diagram arrow 75"/>
+          <p:cNvSpPr/>
+          <p:nvPr/>
+        </p:nvSpPr>
+        <p:spPr>
+          <a:xfrm flipH="1">
+            <a:off x="7104888" y="3840480"/>
+            <a:ext cx="3166567" cy="914"/>
+          </a:xfrm>
+          <a:prstGeom prst="line">
+            <a:avLst/>
+          </a:prstGeom>
+          <a:noFill/>
+          <a:ln w="22225">
+            <a:solidFill>
+              <a:srgbClr val="64748B"/>
+            </a:solidFill>
+            <a:prstDash val="dash"/>
+          </a:ln>
+        </p:spPr>
+      </p:sp>
+      <p:sp>
+        <p:nvSpPr>
+          <p:cNvPr id="34" name="diagram arrow 76"/>
+          <p:cNvSpPr/>
+          <p:nvPr/>
+        </p:nvSpPr>
+        <p:spPr>
+          <a:xfrm flipV="1">
+            <a:off x="7104888" y="3566160"/>
+            <a:ext cx="914" cy="274320"/>
+          </a:xfrm>
+          <a:prstGeom prst="line">
+            <a:avLst/>
+          </a:prstGeom>
+          <a:noFill/>
+          <a:ln w="22225">
+            <a:solidFill>
+              <a:srgbClr val="64748B"/>
+            </a:solidFill>
+            <a:prstDash val="dash"/>
+            <a:tailEnd type="triangle"/>
+          </a:ln>
+        </p:spPr>
+      </p:sp>
+      <p:sp>
+        <p:nvSpPr>
+          <p:cNvPr id="35" name="diagram note 77"/>
+          <p:cNvSpPr txBox="1"/>
+          <p:nvPr/>
+        </p:nvSpPr>
+        <p:spPr>
+          <a:xfrm>
+            <a:off x="7635240" y="3584448"/>
+            <a:ext cx="1463040" cy="292608"/>
+          </a:xfrm>
+          <a:prstGeom prst="rect">
+            <a:avLst/>
+          </a:prstGeom>
+          <a:noFill/>
+          <a:ln/>
+        </p:spPr>
+        <p:txBody>
+          <a:bodyPr wrap="square" lIns="0" tIns="0" rIns="0" bIns="0" rtlCol="0" anchor="ctr"/>
+          <a:lstStyle/>
+          <a:p>
+            <a:pPr algn="ctr" indent="0" marL="0">
+              <a:buNone/>
+            </a:pPr>
+            <a:r>
+              <a:rPr lang="en-US" sz="1200" dirty="0">
+                <a:solidFill>
+                  <a:srgbClr val="475569"/>
+                </a:solidFill>
+              </a:rPr>
+              <a:t>created 1:n</a:t>
+            </a:r>
+            <a:endParaRPr lang="en-US" sz="1200" dirty="0"/>
+          </a:p>
+        </p:txBody>
+      </p:sp>
+      <p:sp>
+        <p:nvSpPr>
+          <p:cNvPr id="25" name="Slide Number Placeholder 0"/>
+          <p:cNvSpPr>
+            <a:spLocks noGrp="1"/>
+          </p:cNvSpPr>
+          <p:nvPr>
+            <p:ph type="sldNum" sz="quarter" idx="4294967295"/>
+          </p:nvPr>
+        </p:nvSpPr>
+        <p:spPr>
+          <a:xfrm>
+            <a:off x="11094415" y="6400800"/>
+            <a:ext cx="548640" cy="274320"/>
+          </a:xfrm>
+          <a:prstGeom prst="rect">
+            <a:avLst/>
+          </a:prstGeom>
+          <a:extLst>
+            <a:ext uri="{C572A759-6A51-4108-AA02-DFA0A04FC94B}">
+              <ma14:wrappingTextBoxFlag xmlns:ma14="http://schemas.microsoft.com/office/mac/drawingml/2011/main" val="0"/>
+            </a:ext>
+          </a:extLst>
+        </p:spPr>
+        <p:txBody>
+          <a:bodyPr/>
+          <a:lstStyle>
+            <a:lvl1pPr>
+              <a:defRPr sz="1000">
+                <a:solidFill>
+                  <a:srgbClr val="64748B"/>
+                </a:solidFill>
+              </a:defRPr>
+            </a:lvl1pPr>
+          </a:lstStyle>
+          <a:p>
+            <a:pPr algn="r"/>
+            <a:fld id="{F7021451-1387-4CA6-816F-3879F97B5CBC}" type="slidenum">
+              <a:rPr b="0" lang="en-US"/>
+              <a:t>14</a:t>
+            </a:fld>
+            <a:endParaRPr lang="en-US"/>
+          </a:p>
+        </p:txBody>
+      </p:sp>
+    </p:spTree>
+  </p:cSld>
+  <p:clrMapOvr>
+    <a:masterClrMapping/>
+  </p:clrMapOvr>
+</p:sld>
+</file>
+
+<file path=ppt/slides/slide15.xml><?xml version="1.0" encoding="utf-8"?>
+<p:sld xmlns:a="http://schemas.openxmlformats.org/drawingml/2006/main" xmlns:r="http://schemas.openxmlformats.org/officeDocument/2006/relationships" xmlns:p="http://schemas.openxmlformats.org/presentationml/2006/main">
+  <p:cSld name="Slide 15">
+    <p:spTree>
+      <p:nvGrpSpPr>
+        <p:cNvPr id="1" name=""/>
+        <p:cNvGrpSpPr/>
+        <p:nvPr/>
+      </p:nvGrpSpPr>
+      <p:grpSpPr>
+        <a:xfrm>
+          <a:off x="0" y="0"/>
+          <a:ext cx="0" cy="0"/>
+          <a:chOff x="0" y="0"/>
+          <a:chExt cx="0" cy="0"/>
+        </a:xfrm>
+      </p:grpSpPr>
+      <p:sp>
+        <p:nvSpPr>
+          <p:cNvPr id="2" name="Text 0"/>
+          <p:cNvSpPr/>
+          <p:nvPr>
+            <p:ph idx="100" type="title" hasCustomPrompt="1"/>
+          </p:nvPr>
+        </p:nvSpPr>
+        <p:spPr>
+          <a:xfrm>
+            <a:off x="548640" y="347472"/>
+            <a:ext cx="11094415" cy="731520"/>
+          </a:xfrm>
+          <a:prstGeom prst="rect">
+            <a:avLst/>
+          </a:prstGeom>
+          <a:noFill/>
+          <a:ln/>
+        </p:spPr>
+        <p:txBody>
+          <a:bodyPr wrap="square" lIns="0" tIns="0" rIns="0" bIns="0" rtlCol="0" anchor="ctr"/>
+          <a:lstStyle/>
+          <a:p>
+            <a:pPr algn="l" indent="0" marL="0">
+              <a:buNone/>
+            </a:pPr>
+            <a:r>
+              <a:rPr lang="en-US" sz="3400" b="1" dirty="0">
+                <a:solidFill>
+                  <a:schemeClr val="tx1"/>
+                </a:solidFill>
+              </a:rPr>
               <a:t>Why it matters, and what we would build next</a:t>
             </a:r>
             <a:endParaRPr lang="en-US" sz="3400" dirty="0"/>
@@ -4245,7 +9574,7 @@
             <a:pPr algn="r"/>
             <a:fld id="{F7021451-1387-4CA6-816F-3879F97B5CBC}" type="slidenum">
               <a:rPr b="0" lang="en-US"/>
-              <a:t>11</a:t>
+              <a:t>15</a:t>
             </a:fld>
             <a:endParaRPr lang="en-US"/>
           </a:p>
@@ -4259,9 +9588,9 @@
 </p:sld>
 </file>
 
-<file path=ppt/slides/slide12.xml><?xml version="1.0" encoding="utf-8"?>
+<file path=ppt/slides/slide16.xml><?xml version="1.0" encoding="utf-8"?>
 <p:sld xmlns:a="http://schemas.openxmlformats.org/drawingml/2006/main" xmlns:r="http://schemas.openxmlformats.org/officeDocument/2006/relationships" xmlns:p="http://schemas.openxmlformats.org/presentationml/2006/main">
-  <p:cSld name="Slide 12">
+  <p:cSld name="Slide 16">
     <p:spTree>
       <p:nvGrpSpPr>
         <p:cNvPr id="1" name=""/>
